--- a/10-Vectorization.pptx
+++ b/10-Vectorization.pptx
@@ -5,10 +5,10 @@
     <p:sldMasterId id="2147483648" r:id="rId1"/>
   </p:sldMasterIdLst>
   <p:notesMasterIdLst>
-    <p:notesMasterId r:id="rId21"/>
+    <p:notesMasterId r:id="rId19"/>
   </p:notesMasterIdLst>
   <p:handoutMasterIdLst>
-    <p:handoutMasterId r:id="rId22"/>
+    <p:handoutMasterId r:id="rId20"/>
   </p:handoutMasterIdLst>
   <p:sldIdLst>
     <p:sldId id="256" r:id="rId2"/>
@@ -28,8 +28,6 @@
     <p:sldId id="2147479181" r:id="rId16"/>
     <p:sldId id="2147479184" r:id="rId17"/>
     <p:sldId id="424" r:id="rId18"/>
-    <p:sldId id="2147479182" r:id="rId19"/>
-    <p:sldId id="2147479183" r:id="rId20"/>
   </p:sldIdLst>
   <p:sldSz cx="12192000" cy="6858000"/>
   <p:notesSz cx="6858000" cy="9144000"/>
@@ -244,7 +242,7 @@
           <a:p>
             <a:fld id="{2B56BDA5-FBCC-43E1-957B-02AF36889AD5}" type="datetimeFigureOut">
               <a:rPr lang="en-US" smtClean="0"/>
-              <a:t>9/7/2024</a:t>
+              <a:t>9/8/2024</a:t>
             </a:fld>
             <a:endParaRPr lang="en-US" dirty="0"/>
           </a:p>
@@ -421,7 +419,7 @@
           <a:p>
             <a:fld id="{8F44CDF0-0D54-4AFE-B409-D6358A9BB9A1}" type="datetimeFigureOut">
               <a:rPr lang="en-US" smtClean="0"/>
-              <a:t>9/7/2024</a:t>
+              <a:t>9/8/2024</a:t>
             </a:fld>
             <a:endParaRPr lang="en-US" dirty="0"/>
           </a:p>
@@ -2668,369 +2666,6 @@
     <p:extLst>
       <p:ext uri="{BB962C8B-B14F-4D97-AF65-F5344CB8AC3E}">
         <p14:creationId xmlns:p14="http://schemas.microsoft.com/office/powerpoint/2010/main" val="1674645597"/>
-      </p:ext>
-    </p:extLst>
-  </p:cSld>
-  <p:clrMapOvr>
-    <a:masterClrMapping/>
-  </p:clrMapOvr>
-</p:notes>
-</file>
-
-<file path=ppt/notesSlides/notesSlide17.xml><?xml version="1.0" encoding="utf-8"?>
-<p:notes xmlns:a="http://schemas.openxmlformats.org/drawingml/2006/main" xmlns:r="http://schemas.openxmlformats.org/officeDocument/2006/relationships" xmlns:p="http://schemas.openxmlformats.org/presentationml/2006/main">
-  <p:cSld>
-    <p:spTree>
-      <p:nvGrpSpPr>
-        <p:cNvPr id="1" name=""/>
-        <p:cNvGrpSpPr/>
-        <p:nvPr/>
-      </p:nvGrpSpPr>
-      <p:grpSpPr>
-        <a:xfrm>
-          <a:off x="0" y="0"/>
-          <a:ext cx="0" cy="0"/>
-          <a:chOff x="0" y="0"/>
-          <a:chExt cx="0" cy="0"/>
-        </a:xfrm>
-      </p:grpSpPr>
-      <p:sp>
-        <p:nvSpPr>
-          <p:cNvPr id="2" name="Slide Image Placeholder 1"/>
-          <p:cNvSpPr>
-            <a:spLocks noGrp="1" noRot="1" noChangeAspect="1"/>
-          </p:cNvSpPr>
-          <p:nvPr>
-            <p:ph type="sldImg"/>
-          </p:nvPr>
-        </p:nvSpPr>
-        <p:spPr/>
-      </p:sp>
-      <p:sp>
-        <p:nvSpPr>
-          <p:cNvPr id="3" name="Notes Placeholder 2"/>
-          <p:cNvSpPr>
-            <a:spLocks noGrp="1"/>
-          </p:cNvSpPr>
-          <p:nvPr>
-            <p:ph type="body" idx="1"/>
-          </p:nvPr>
-        </p:nvSpPr>
-        <p:spPr/>
-        <p:txBody>
-          <a:bodyPr/>
-          <a:lstStyle/>
-          <a:p>
-            <a:r>
-              <a:rPr lang="en-US" dirty="0"/>
-              <a:t>Demonstrating vector search in Cosmos DB.</a:t>
-            </a:r>
-          </a:p>
-          <a:p>
-            <a:endParaRPr lang="en-US" dirty="0"/>
-          </a:p>
-          <a:p>
-            <a:pPr marL="171450" indent="-171450">
-              <a:buFontTx/>
-              <a:buChar char="-"/>
-            </a:pPr>
-            <a:r>
-              <a:rPr lang="en-US" dirty="0"/>
-              <a:t>Show how to enable the vector search feature in Cosmos</a:t>
-            </a:r>
-          </a:p>
-          <a:p>
-            <a:pPr marL="171450" indent="-171450">
-              <a:buFontTx/>
-              <a:buChar char="-"/>
-            </a:pPr>
-            <a:r>
-              <a:rPr lang="en-US" dirty="0"/>
-              <a:t>Set up a new container, setting the container vector policy and selecting a vector indexing policy.</a:t>
-            </a:r>
-          </a:p>
-          <a:p>
-            <a:pPr marL="171450" indent="-171450">
-              <a:buFontTx/>
-              <a:buChar char="-"/>
-            </a:pPr>
-            <a:r>
-              <a:rPr lang="en-US" dirty="0"/>
-              <a:t>Talk about having to use an Azure Function or worker process to process the change feed, which is external to the database…</a:t>
-            </a:r>
-          </a:p>
-          <a:p>
-            <a:pPr marL="171450" indent="-171450">
-              <a:buFontTx/>
-              <a:buChar char="-"/>
-            </a:pPr>
-            <a:r>
-              <a:rPr lang="en-US" dirty="0"/>
-              <a:t>Talk about Azure OpenAI embeddings model and how it is used here.</a:t>
-            </a:r>
-          </a:p>
-          <a:p>
-            <a:pPr marL="171450" indent="-171450">
-              <a:buFontTx/>
-              <a:buChar char="-"/>
-            </a:pPr>
-            <a:r>
-              <a:rPr lang="en-US" dirty="0"/>
-              <a:t>Show capabilities in Cosmos</a:t>
-            </a:r>
-          </a:p>
-        </p:txBody>
-      </p:sp>
-      <p:sp>
-        <p:nvSpPr>
-          <p:cNvPr id="4" name="Slide Number Placeholder 3"/>
-          <p:cNvSpPr>
-            <a:spLocks noGrp="1"/>
-          </p:cNvSpPr>
-          <p:nvPr>
-            <p:ph type="sldNum" sz="quarter" idx="5"/>
-          </p:nvPr>
-        </p:nvSpPr>
-        <p:spPr/>
-        <p:txBody>
-          <a:bodyPr/>
-          <a:lstStyle/>
-          <a:p>
-            <a:fld id="{37E24C93-78CA-4AF0-9E77-825D60ABA46D}" type="slidenum">
-              <a:rPr lang="en-US" smtClean="0"/>
-              <a:t>18</a:t>
-            </a:fld>
-            <a:endParaRPr lang="en-US" dirty="0"/>
-          </a:p>
-        </p:txBody>
-      </p:sp>
-    </p:spTree>
-    <p:extLst>
-      <p:ext uri="{BB962C8B-B14F-4D97-AF65-F5344CB8AC3E}">
-        <p14:creationId xmlns:p14="http://schemas.microsoft.com/office/powerpoint/2010/main" val="1421794754"/>
-      </p:ext>
-    </p:extLst>
-  </p:cSld>
-  <p:clrMapOvr>
-    <a:masterClrMapping/>
-  </p:clrMapOvr>
-</p:notes>
-</file>
-
-<file path=ppt/notesSlides/notesSlide18.xml><?xml version="1.0" encoding="utf-8"?>
-<p:notes xmlns:a="http://schemas.openxmlformats.org/drawingml/2006/main" xmlns:r="http://schemas.openxmlformats.org/officeDocument/2006/relationships" xmlns:p="http://schemas.openxmlformats.org/presentationml/2006/main">
-  <p:cSld>
-    <p:spTree>
-      <p:nvGrpSpPr>
-        <p:cNvPr id="1" name=""/>
-        <p:cNvGrpSpPr/>
-        <p:nvPr/>
-      </p:nvGrpSpPr>
-      <p:grpSpPr>
-        <a:xfrm>
-          <a:off x="0" y="0"/>
-          <a:ext cx="0" cy="0"/>
-          <a:chOff x="0" y="0"/>
-          <a:chExt cx="0" cy="0"/>
-        </a:xfrm>
-      </p:grpSpPr>
-      <p:sp>
-        <p:nvSpPr>
-          <p:cNvPr id="2" name="Slide Image Placeholder 1"/>
-          <p:cNvSpPr>
-            <a:spLocks noGrp="1" noRot="1" noChangeAspect="1"/>
-          </p:cNvSpPr>
-          <p:nvPr>
-            <p:ph type="sldImg"/>
-          </p:nvPr>
-        </p:nvSpPr>
-        <p:spPr/>
-      </p:sp>
-      <p:sp>
-        <p:nvSpPr>
-          <p:cNvPr id="3" name="Notes Placeholder 2"/>
-          <p:cNvSpPr>
-            <a:spLocks noGrp="1"/>
-          </p:cNvSpPr>
-          <p:nvPr>
-            <p:ph type="body" idx="1"/>
-          </p:nvPr>
-        </p:nvSpPr>
-        <p:spPr/>
-        <p:txBody>
-          <a:bodyPr/>
-          <a:lstStyle/>
-          <a:p>
-            <a:r>
-              <a:rPr lang="en-US" dirty="0"/>
-              <a:t>Demonstrate similarity searches in Postgres</a:t>
-            </a:r>
-          </a:p>
-          <a:p>
-            <a:endParaRPr lang="en-US" dirty="0"/>
-          </a:p>
-          <a:p>
-            <a:r>
-              <a:rPr lang="en-US" dirty="0"/>
-              <a:t>Go through lab 13 of the </a:t>
-            </a:r>
-            <a:r>
-              <a:rPr lang="en-US" dirty="0" err="1"/>
-              <a:t>mslearn-postgres</a:t>
-            </a:r>
-            <a:r>
-              <a:rPr lang="en-US" dirty="0"/>
-              <a:t> repo.  Start with ## Create and store embedding vectors.</a:t>
-            </a:r>
-          </a:p>
-          <a:p>
-            <a:pPr marL="171450" indent="-171450">
-              <a:buFont typeface="Arial" panose="020B0604020202020204" pitchFamily="34" charset="0"/>
-              <a:buChar char="•"/>
-            </a:pPr>
-            <a:r>
-              <a:rPr lang="en-US" dirty="0"/>
-              <a:t>Talk through how to install the extension (</a:t>
-            </a:r>
-            <a:r>
-              <a:rPr lang="en-US" dirty="0" err="1"/>
-              <a:t>azure_ai</a:t>
-            </a:r>
-            <a:r>
-              <a:rPr lang="en-US" dirty="0"/>
-              <a:t> and </a:t>
-            </a:r>
-            <a:r>
-              <a:rPr lang="en-US" dirty="0" err="1"/>
-              <a:t>pgvector</a:t>
-            </a:r>
-            <a:r>
-              <a:rPr lang="en-US" dirty="0"/>
-              <a:t>)</a:t>
-            </a:r>
-          </a:p>
-          <a:p>
-            <a:pPr marL="171450" indent="-171450">
-              <a:buFont typeface="Arial" panose="020B0604020202020204" pitchFamily="34" charset="0"/>
-              <a:buChar char="•"/>
-            </a:pPr>
-            <a:r>
-              <a:rPr lang="en-US" dirty="0"/>
-              <a:t>Talk about configuring the extension. Show how to view the endpoint setting…</a:t>
-            </a:r>
-          </a:p>
-          <a:p>
-            <a:pPr marL="171450" indent="-171450">
-              <a:buFont typeface="Arial" panose="020B0604020202020204" pitchFamily="34" charset="0"/>
-              <a:buChar char="•"/>
-            </a:pPr>
-            <a:r>
-              <a:rPr lang="en-US" dirty="0"/>
-              <a:t>Show how to use a query to generate </a:t>
-            </a:r>
-            <a:r>
-              <a:rPr lang="en-US" dirty="0" err="1"/>
-              <a:t>embedings</a:t>
-            </a:r>
-            <a:r>
-              <a:rPr lang="en-US" dirty="0"/>
-              <a:t> for a simple query.</a:t>
-            </a:r>
-          </a:p>
-          <a:p>
-            <a:pPr marL="171450" indent="-171450">
-              <a:buFont typeface="Arial" panose="020B0604020202020204" pitchFamily="34" charset="0"/>
-              <a:buChar char="•"/>
-            </a:pPr>
-            <a:r>
-              <a:rPr lang="en-US" dirty="0"/>
-              <a:t>Show adding a vector column to the table.</a:t>
-            </a:r>
-          </a:p>
-          <a:p>
-            <a:pPr marL="171450" indent="-171450">
-              <a:buFont typeface="Arial" panose="020B0604020202020204" pitchFamily="34" charset="0"/>
-              <a:buChar char="•"/>
-            </a:pPr>
-            <a:endParaRPr lang="en-US" dirty="0"/>
-          </a:p>
-          <a:p>
-            <a:endParaRPr lang="en-US" dirty="0"/>
-          </a:p>
-          <a:p>
-            <a:pPr marL="171450" indent="-171450">
-              <a:buFontTx/>
-              <a:buChar char="-"/>
-            </a:pPr>
-            <a:r>
-              <a:rPr lang="en-US" dirty="0"/>
-              <a:t>Talk about how the AI extension allows vectors to be generated directly from the database (no need for external processor, like with Cosmos)</a:t>
-            </a:r>
-          </a:p>
-          <a:p>
-            <a:pPr marL="171450" indent="-171450">
-              <a:buFontTx/>
-              <a:buChar char="-"/>
-            </a:pPr>
-            <a:r>
-              <a:rPr lang="en-US" dirty="0"/>
-              <a:t>Mention that it is doing the same things as the Azure Function with Cosmos, but that plumbing has been handled for you by the extension…</a:t>
-            </a:r>
-          </a:p>
-          <a:p>
-            <a:pPr marL="171450" indent="-171450">
-              <a:buFontTx/>
-              <a:buChar char="-"/>
-            </a:pPr>
-            <a:r>
-              <a:rPr lang="en-US" dirty="0"/>
-              <a:t>Talk about </a:t>
-            </a:r>
-            <a:r>
-              <a:rPr lang="en-US" dirty="0" err="1"/>
-              <a:t>pgvector</a:t>
-            </a:r>
-            <a:r>
-              <a:rPr lang="en-US" dirty="0"/>
-              <a:t> extension</a:t>
-            </a:r>
-          </a:p>
-          <a:p>
-            <a:pPr marL="171450" indent="-171450">
-              <a:buFontTx/>
-              <a:buChar char="-"/>
-            </a:pPr>
-            <a:endParaRPr lang="en-US" dirty="0"/>
-          </a:p>
-        </p:txBody>
-      </p:sp>
-      <p:sp>
-        <p:nvSpPr>
-          <p:cNvPr id="4" name="Slide Number Placeholder 3"/>
-          <p:cNvSpPr>
-            <a:spLocks noGrp="1"/>
-          </p:cNvSpPr>
-          <p:nvPr>
-            <p:ph type="sldNum" sz="quarter" idx="5"/>
-          </p:nvPr>
-        </p:nvSpPr>
-        <p:spPr/>
-        <p:txBody>
-          <a:bodyPr/>
-          <a:lstStyle/>
-          <a:p>
-            <a:fld id="{37E24C93-78CA-4AF0-9E77-825D60ABA46D}" type="slidenum">
-              <a:rPr lang="en-US" smtClean="0"/>
-              <a:t>19</a:t>
-            </a:fld>
-            <a:endParaRPr lang="en-US" dirty="0"/>
-          </a:p>
-        </p:txBody>
-      </p:sp>
-    </p:spTree>
-    <p:extLst>
-      <p:ext uri="{BB962C8B-B14F-4D97-AF65-F5344CB8AC3E}">
-        <p14:creationId xmlns:p14="http://schemas.microsoft.com/office/powerpoint/2010/main" val="1529865146"/>
       </p:ext>
     </p:extLst>
   </p:cSld>
@@ -25098,13 +24733,13 @@
   <p:clrMapOvr>
     <a:masterClrMapping/>
   </p:clrMapOvr>
-  <mc:AlternateContent xmlns:mc="http://schemas.openxmlformats.org/markup-compatibility/2006">
-    <mc:Choice xmlns:p14="http://schemas.microsoft.com/office/powerpoint/2010/main" Requires="p14">
+  <mc:AlternateContent xmlns:mc="http://schemas.openxmlformats.org/markup-compatibility/2006" xmlns:p14="http://schemas.microsoft.com/office/powerpoint/2010/main">
+    <mc:Choice Requires="p14">
       <p:transition spd="med" p14:dur="700">
         <p:fade/>
       </p:transition>
     </mc:Choice>
-    <mc:Fallback>
+    <mc:Fallback xmlns="">
       <p:transition spd="med">
         <p:fade/>
       </p:transition>
@@ -25212,466 +24847,6 @@
     <p:extLst>
       <p:ext uri="{BB962C8B-B14F-4D97-AF65-F5344CB8AC3E}">
         <p14:creationId xmlns:p14="http://schemas.microsoft.com/office/powerpoint/2010/main" val="86463890"/>
-      </p:ext>
-    </p:extLst>
-  </p:cSld>
-  <p:clrMapOvr>
-    <a:masterClrMapping/>
-  </p:clrMapOvr>
-</p:sld>
-</file>
-
-<file path=ppt/slides/slide18.xml><?xml version="1.0" encoding="utf-8"?>
-<p:sld xmlns:a="http://schemas.openxmlformats.org/drawingml/2006/main" xmlns:r="http://schemas.openxmlformats.org/officeDocument/2006/relationships" xmlns:p="http://schemas.openxmlformats.org/presentationml/2006/main">
-  <p:cSld>
-    <p:spTree>
-      <p:nvGrpSpPr>
-        <p:cNvPr id="1" name=""/>
-        <p:cNvGrpSpPr/>
-        <p:nvPr/>
-      </p:nvGrpSpPr>
-      <p:grpSpPr>
-        <a:xfrm>
-          <a:off x="0" y="0"/>
-          <a:ext cx="0" cy="0"/>
-          <a:chOff x="0" y="0"/>
-          <a:chExt cx="0" cy="0"/>
-        </a:xfrm>
-      </p:grpSpPr>
-      <p:sp>
-        <p:nvSpPr>
-          <p:cNvPr id="2" name="Title 1">
-            <a:extLst>
-              <a:ext uri="{FF2B5EF4-FFF2-40B4-BE49-F238E27FC236}">
-                <a16:creationId xmlns:a16="http://schemas.microsoft.com/office/drawing/2014/main" id="{A5799DBC-22FC-30D9-DD52-DF0FA6EE78EE}"/>
-              </a:ext>
-            </a:extLst>
-          </p:cNvPr>
-          <p:cNvSpPr>
-            <a:spLocks noGrp="1"/>
-          </p:cNvSpPr>
-          <p:nvPr>
-            <p:ph type="title"/>
-          </p:nvPr>
-        </p:nvSpPr>
-        <p:spPr/>
-        <p:txBody>
-          <a:bodyPr/>
-          <a:lstStyle/>
-          <a:p>
-            <a:r>
-              <a:rPr lang="en-US" dirty="0"/>
-              <a:t>Cosmos demo</a:t>
-            </a:r>
-          </a:p>
-        </p:txBody>
-      </p:sp>
-      <p:sp>
-        <p:nvSpPr>
-          <p:cNvPr id="3" name="Footer Placeholder 2">
-            <a:extLst>
-              <a:ext uri="{FF2B5EF4-FFF2-40B4-BE49-F238E27FC236}">
-                <a16:creationId xmlns:a16="http://schemas.microsoft.com/office/drawing/2014/main" id="{51B446A8-0A51-7454-2630-4BA2204F0909}"/>
-              </a:ext>
-            </a:extLst>
-          </p:cNvPr>
-          <p:cNvSpPr>
-            <a:spLocks noGrp="1"/>
-          </p:cNvSpPr>
-          <p:nvPr>
-            <p:ph type="ftr" sz="quarter" idx="3"/>
-          </p:nvPr>
-        </p:nvSpPr>
-        <p:spPr/>
-        <p:txBody>
-          <a:bodyPr/>
-          <a:lstStyle/>
-          <a:p>
-            <a:r>
-              <a:rPr lang="en-US"/>
-              <a:t>WWW.SOLLIANCE.NET</a:t>
-            </a:r>
-            <a:endParaRPr lang="en-US" dirty="0"/>
-          </a:p>
-        </p:txBody>
-      </p:sp>
-      <p:sp>
-        <p:nvSpPr>
-          <p:cNvPr id="4" name="Slide Number Placeholder 3">
-            <a:extLst>
-              <a:ext uri="{FF2B5EF4-FFF2-40B4-BE49-F238E27FC236}">
-                <a16:creationId xmlns:a16="http://schemas.microsoft.com/office/drawing/2014/main" id="{029D1D89-A62B-5A4B-C643-8020962E4FC4}"/>
-              </a:ext>
-            </a:extLst>
-          </p:cNvPr>
-          <p:cNvSpPr>
-            <a:spLocks noGrp="1"/>
-          </p:cNvSpPr>
-          <p:nvPr>
-            <p:ph type="sldNum" sz="quarter" idx="4"/>
-          </p:nvPr>
-        </p:nvSpPr>
-        <p:spPr/>
-        <p:txBody>
-          <a:bodyPr/>
-          <a:lstStyle/>
-          <a:p>
-            <a:fld id="{00F9DAA1-1DF7-43E0-8E29-0CE1148553C7}" type="slidenum">
-              <a:rPr lang="en-US" smtClean="0"/>
-              <a:pPr/>
-              <a:t>18</a:t>
-            </a:fld>
-            <a:endParaRPr lang="en-US" dirty="0"/>
-          </a:p>
-        </p:txBody>
-      </p:sp>
-      <p:sp>
-        <p:nvSpPr>
-          <p:cNvPr id="5" name="Text Placeholder 4">
-            <a:extLst>
-              <a:ext uri="{FF2B5EF4-FFF2-40B4-BE49-F238E27FC236}">
-                <a16:creationId xmlns:a16="http://schemas.microsoft.com/office/drawing/2014/main" id="{5D09D29B-E760-447F-6B94-9093329DD6BB}"/>
-              </a:ext>
-            </a:extLst>
-          </p:cNvPr>
-          <p:cNvSpPr>
-            <a:spLocks noGrp="1"/>
-          </p:cNvSpPr>
-          <p:nvPr>
-            <p:ph type="body" sz="quarter" idx="10"/>
-          </p:nvPr>
-        </p:nvSpPr>
-        <p:spPr/>
-        <p:txBody>
-          <a:bodyPr>
-            <a:normAutofit fontScale="92500"/>
-          </a:bodyPr>
-          <a:lstStyle/>
-          <a:p>
-            <a:r>
-              <a:rPr lang="en-US" dirty="0"/>
-              <a:t>Talk about how to enable the feature and show while talking about it.</a:t>
-            </a:r>
-          </a:p>
-          <a:p>
-            <a:r>
-              <a:rPr lang="en-US" dirty="0"/>
-              <a:t>Show how to add a container vector policy and indexing policy on a new container (don’t save)</a:t>
-            </a:r>
-          </a:p>
-          <a:p>
-            <a:r>
-              <a:rPr lang="en-US" dirty="0"/>
-              <a:t>Talk about Azure function processing the change feed</a:t>
-            </a:r>
-          </a:p>
-          <a:p>
-            <a:pPr lvl="1"/>
-            <a:r>
-              <a:rPr lang="en-US" dirty="0"/>
-              <a:t>Show code</a:t>
-            </a:r>
-          </a:p>
-          <a:p>
-            <a:r>
-              <a:rPr lang="en-US" dirty="0"/>
-              <a:t>Insert a record using Data Explorer</a:t>
-            </a:r>
-          </a:p>
-          <a:p>
-            <a:pPr lvl="1"/>
-            <a:r>
-              <a:rPr lang="en-US" dirty="0"/>
-              <a:t>Show the log stream for the function app</a:t>
-            </a:r>
-          </a:p>
-          <a:p>
-            <a:pPr lvl="1"/>
-            <a:r>
-              <a:rPr lang="en-US" dirty="0"/>
-              <a:t>Return to data explorer and refresh the record to show embeddings</a:t>
-            </a:r>
-          </a:p>
-          <a:p>
-            <a:r>
-              <a:rPr lang="en-US" dirty="0"/>
-              <a:t>Execute vector search query in notebook in repo</a:t>
-            </a:r>
-          </a:p>
-          <a:p>
-            <a:pPr lvl="1"/>
-            <a:r>
-              <a:rPr lang="en-US" dirty="0"/>
-              <a:t>Talk about the query and </a:t>
-            </a:r>
-            <a:r>
-              <a:rPr lang="en-US" dirty="0" err="1"/>
-              <a:t>VectorDistance</a:t>
-            </a:r>
-            <a:r>
-              <a:rPr lang="en-US" dirty="0"/>
-              <a:t> function</a:t>
-            </a:r>
-          </a:p>
-          <a:p>
-            <a:r>
-              <a:rPr lang="en-US" dirty="0"/>
-              <a:t>Open </a:t>
-            </a:r>
-            <a:r>
-              <a:rPr lang="en-US" dirty="0" err="1"/>
-              <a:t>Streamlit</a:t>
-            </a:r>
-            <a:r>
-              <a:rPr lang="en-US" dirty="0"/>
-              <a:t> app</a:t>
-            </a:r>
-          </a:p>
-          <a:p>
-            <a:pPr lvl="1"/>
-            <a:r>
-              <a:rPr lang="en-US" dirty="0"/>
-              <a:t>Use vector search page to show how a natural language query can be used to query data</a:t>
-            </a:r>
-          </a:p>
-          <a:p>
-            <a:pPr lvl="1"/>
-            <a:r>
-              <a:rPr lang="en-US" dirty="0"/>
-              <a:t>Use similarity search slider to talk about how you can use this to remove less relevant results</a:t>
-            </a:r>
-          </a:p>
-        </p:txBody>
-      </p:sp>
-      <p:sp>
-        <p:nvSpPr>
-          <p:cNvPr id="6" name="Text Placeholder 5">
-            <a:extLst>
-              <a:ext uri="{FF2B5EF4-FFF2-40B4-BE49-F238E27FC236}">
-                <a16:creationId xmlns:a16="http://schemas.microsoft.com/office/drawing/2014/main" id="{CEC876F8-27E8-A8E7-BC5F-FB605BEA8606}"/>
-              </a:ext>
-            </a:extLst>
-          </p:cNvPr>
-          <p:cNvSpPr>
-            <a:spLocks noGrp="1"/>
-          </p:cNvSpPr>
-          <p:nvPr>
-            <p:ph type="body" sz="quarter" idx="16"/>
-          </p:nvPr>
-        </p:nvSpPr>
-        <p:spPr/>
-        <p:txBody>
-          <a:bodyPr/>
-          <a:lstStyle/>
-          <a:p>
-            <a:r>
-              <a:rPr lang="en-US" dirty="0" err="1"/>
-              <a:t>TechExcel</a:t>
-            </a:r>
-            <a:r>
-              <a:rPr lang="en-US" dirty="0"/>
-              <a:t> environment and resources</a:t>
-            </a:r>
-          </a:p>
-        </p:txBody>
-      </p:sp>
-    </p:spTree>
-    <p:extLst>
-      <p:ext uri="{BB962C8B-B14F-4D97-AF65-F5344CB8AC3E}">
-        <p14:creationId xmlns:p14="http://schemas.microsoft.com/office/powerpoint/2010/main" val="2335771196"/>
-      </p:ext>
-    </p:extLst>
-  </p:cSld>
-  <p:clrMapOvr>
-    <a:masterClrMapping/>
-  </p:clrMapOvr>
-</p:sld>
-</file>
-
-<file path=ppt/slides/slide19.xml><?xml version="1.0" encoding="utf-8"?>
-<p:sld xmlns:a="http://schemas.openxmlformats.org/drawingml/2006/main" xmlns:r="http://schemas.openxmlformats.org/officeDocument/2006/relationships" xmlns:p="http://schemas.openxmlformats.org/presentationml/2006/main">
-  <p:cSld>
-    <p:spTree>
-      <p:nvGrpSpPr>
-        <p:cNvPr id="1" name=""/>
-        <p:cNvGrpSpPr/>
-        <p:nvPr/>
-      </p:nvGrpSpPr>
-      <p:grpSpPr>
-        <a:xfrm>
-          <a:off x="0" y="0"/>
-          <a:ext cx="0" cy="0"/>
-          <a:chOff x="0" y="0"/>
-          <a:chExt cx="0" cy="0"/>
-        </a:xfrm>
-      </p:grpSpPr>
-      <p:sp>
-        <p:nvSpPr>
-          <p:cNvPr id="2" name="Title 1">
-            <a:extLst>
-              <a:ext uri="{FF2B5EF4-FFF2-40B4-BE49-F238E27FC236}">
-                <a16:creationId xmlns:a16="http://schemas.microsoft.com/office/drawing/2014/main" id="{A5799DBC-22FC-30D9-DD52-DF0FA6EE78EE}"/>
-              </a:ext>
-            </a:extLst>
-          </p:cNvPr>
-          <p:cNvSpPr>
-            <a:spLocks noGrp="1"/>
-          </p:cNvSpPr>
-          <p:nvPr>
-            <p:ph type="title"/>
-          </p:nvPr>
-        </p:nvSpPr>
-        <p:spPr/>
-        <p:txBody>
-          <a:bodyPr/>
-          <a:lstStyle/>
-          <a:p>
-            <a:r>
-              <a:rPr lang="en-US" dirty="0"/>
-              <a:t>Postgres demo</a:t>
-            </a:r>
-          </a:p>
-        </p:txBody>
-      </p:sp>
-      <p:sp>
-        <p:nvSpPr>
-          <p:cNvPr id="3" name="Footer Placeholder 2">
-            <a:extLst>
-              <a:ext uri="{FF2B5EF4-FFF2-40B4-BE49-F238E27FC236}">
-                <a16:creationId xmlns:a16="http://schemas.microsoft.com/office/drawing/2014/main" id="{51B446A8-0A51-7454-2630-4BA2204F0909}"/>
-              </a:ext>
-            </a:extLst>
-          </p:cNvPr>
-          <p:cNvSpPr>
-            <a:spLocks noGrp="1"/>
-          </p:cNvSpPr>
-          <p:nvPr>
-            <p:ph type="ftr" sz="quarter" idx="3"/>
-          </p:nvPr>
-        </p:nvSpPr>
-        <p:spPr/>
-        <p:txBody>
-          <a:bodyPr/>
-          <a:lstStyle/>
-          <a:p>
-            <a:r>
-              <a:rPr lang="en-US"/>
-              <a:t>WWW.SOLLIANCE.NET</a:t>
-            </a:r>
-            <a:endParaRPr lang="en-US" dirty="0"/>
-          </a:p>
-        </p:txBody>
-      </p:sp>
-      <p:sp>
-        <p:nvSpPr>
-          <p:cNvPr id="4" name="Slide Number Placeholder 3">
-            <a:extLst>
-              <a:ext uri="{FF2B5EF4-FFF2-40B4-BE49-F238E27FC236}">
-                <a16:creationId xmlns:a16="http://schemas.microsoft.com/office/drawing/2014/main" id="{029D1D89-A62B-5A4B-C643-8020962E4FC4}"/>
-              </a:ext>
-            </a:extLst>
-          </p:cNvPr>
-          <p:cNvSpPr>
-            <a:spLocks noGrp="1"/>
-          </p:cNvSpPr>
-          <p:nvPr>
-            <p:ph type="sldNum" sz="quarter" idx="4"/>
-          </p:nvPr>
-        </p:nvSpPr>
-        <p:spPr/>
-        <p:txBody>
-          <a:bodyPr/>
-          <a:lstStyle/>
-          <a:p>
-            <a:fld id="{00F9DAA1-1DF7-43E0-8E29-0CE1148553C7}" type="slidenum">
-              <a:rPr lang="en-US" smtClean="0"/>
-              <a:pPr/>
-              <a:t>19</a:t>
-            </a:fld>
-            <a:endParaRPr lang="en-US" dirty="0"/>
-          </a:p>
-        </p:txBody>
-      </p:sp>
-      <p:sp>
-        <p:nvSpPr>
-          <p:cNvPr id="5" name="Text Placeholder 4">
-            <a:extLst>
-              <a:ext uri="{FF2B5EF4-FFF2-40B4-BE49-F238E27FC236}">
-                <a16:creationId xmlns:a16="http://schemas.microsoft.com/office/drawing/2014/main" id="{5D09D29B-E760-447F-6B94-9093329DD6BB}"/>
-              </a:ext>
-            </a:extLst>
-          </p:cNvPr>
-          <p:cNvSpPr>
-            <a:spLocks noGrp="1"/>
-          </p:cNvSpPr>
-          <p:nvPr>
-            <p:ph type="body" sz="quarter" idx="10"/>
-          </p:nvPr>
-        </p:nvSpPr>
-        <p:spPr/>
-        <p:txBody>
-          <a:bodyPr>
-            <a:normAutofit/>
-          </a:bodyPr>
-          <a:lstStyle/>
-          <a:p>
-            <a:r>
-              <a:rPr lang="en-US" dirty="0"/>
-              <a:t>Talk about the Azure AI extension and its various components</a:t>
-            </a:r>
-          </a:p>
-          <a:p>
-            <a:r>
-              <a:rPr lang="en-US" dirty="0"/>
-              <a:t>TODO: Reference the </a:t>
-            </a:r>
-            <a:r>
-              <a:rPr lang="en-US" dirty="0" err="1"/>
-              <a:t>mslearn-postgres</a:t>
-            </a:r>
-            <a:r>
-              <a:rPr lang="en-US" dirty="0"/>
-              <a:t> repo and the steps there to put this one together.</a:t>
-            </a:r>
-          </a:p>
-        </p:txBody>
-      </p:sp>
-      <p:sp>
-        <p:nvSpPr>
-          <p:cNvPr id="6" name="Text Placeholder 5">
-            <a:extLst>
-              <a:ext uri="{FF2B5EF4-FFF2-40B4-BE49-F238E27FC236}">
-                <a16:creationId xmlns:a16="http://schemas.microsoft.com/office/drawing/2014/main" id="{CEC876F8-27E8-A8E7-BC5F-FB605BEA8606}"/>
-              </a:ext>
-            </a:extLst>
-          </p:cNvPr>
-          <p:cNvSpPr>
-            <a:spLocks noGrp="1"/>
-          </p:cNvSpPr>
-          <p:nvPr>
-            <p:ph type="body" sz="quarter" idx="16"/>
-          </p:nvPr>
-        </p:nvSpPr>
-        <p:spPr/>
-        <p:txBody>
-          <a:bodyPr/>
-          <a:lstStyle/>
-          <a:p>
-            <a:r>
-              <a:rPr lang="en-US" dirty="0" err="1"/>
-              <a:t>Mslearn-postgres</a:t>
-            </a:r>
-            <a:r>
-              <a:rPr lang="en-US" dirty="0"/>
-              <a:t> environment and resources</a:t>
-            </a:r>
-          </a:p>
-        </p:txBody>
-      </p:sp>
-    </p:spTree>
-    <p:extLst>
-      <p:ext uri="{BB962C8B-B14F-4D97-AF65-F5344CB8AC3E}">
-        <p14:creationId xmlns:p14="http://schemas.microsoft.com/office/powerpoint/2010/main" val="3546977986"/>
       </p:ext>
     </p:extLst>
   </p:cSld>

--- a/10-Vectorization.pptx
+++ b/10-Vectorization.pptx
@@ -5,10 +5,10 @@
     <p:sldMasterId id="2147483648" r:id="rId1"/>
   </p:sldMasterIdLst>
   <p:notesMasterIdLst>
-    <p:notesMasterId r:id="rId19"/>
+    <p:notesMasterId r:id="rId22"/>
   </p:notesMasterIdLst>
   <p:handoutMasterIdLst>
-    <p:handoutMasterId r:id="rId20"/>
+    <p:handoutMasterId r:id="rId23"/>
   </p:handoutMasterIdLst>
   <p:sldIdLst>
     <p:sldId id="256" r:id="rId2"/>
@@ -19,15 +19,18 @@
     <p:sldId id="2147479178" r:id="rId7"/>
     <p:sldId id="2147478864" r:id="rId8"/>
     <p:sldId id="2147479135" r:id="rId9"/>
-    <p:sldId id="2134804706" r:id="rId10"/>
-    <p:sldId id="258" r:id="rId11"/>
-    <p:sldId id="420" r:id="rId12"/>
-    <p:sldId id="2147479179" r:id="rId13"/>
-    <p:sldId id="2147478938" r:id="rId14"/>
-    <p:sldId id="259" r:id="rId15"/>
-    <p:sldId id="2147479181" r:id="rId16"/>
-    <p:sldId id="2147479184" r:id="rId17"/>
-    <p:sldId id="424" r:id="rId18"/>
+    <p:sldId id="2147478865" r:id="rId10"/>
+    <p:sldId id="2147478866" r:id="rId11"/>
+    <p:sldId id="2147478940" r:id="rId12"/>
+    <p:sldId id="2134804706" r:id="rId13"/>
+    <p:sldId id="258" r:id="rId14"/>
+    <p:sldId id="420" r:id="rId15"/>
+    <p:sldId id="2147479179" r:id="rId16"/>
+    <p:sldId id="2147478938" r:id="rId17"/>
+    <p:sldId id="259" r:id="rId18"/>
+    <p:sldId id="2147479181" r:id="rId19"/>
+    <p:sldId id="2147479184" r:id="rId20"/>
+    <p:sldId id="424" r:id="rId21"/>
   </p:sldIdLst>
   <p:sldSz cx="12192000" cy="6858000"/>
   <p:notesSz cx="6858000" cy="9144000"/>
@@ -978,6 +981,212 @@
           <a:bodyPr/>
           <a:lstStyle/>
           <a:p>
+            <a:pPr marL="0" marR="0" lvl="0" indent="0" algn="l" defTabSz="914400" rtl="0" eaLnBrk="1" fontAlgn="auto" latinLnBrk="0" hangingPunct="1">
+              <a:lnSpc>
+                <a:spcPct val="100000"/>
+              </a:lnSpc>
+              <a:spcBef>
+                <a:spcPts val="0"/>
+              </a:spcBef>
+              <a:spcAft>
+                <a:spcPts val="0"/>
+              </a:spcAft>
+              <a:buClrTx/>
+              <a:buSzTx/>
+              <a:buFontTx/>
+              <a:buNone/>
+              <a:tabLst/>
+              <a:defRPr/>
+            </a:pPr>
+            <a:r>
+              <a:rPr lang="en-US" dirty="0"/>
+              <a:t>https://beta.openai.com/docs/guides/embeddings/use-cases</a:t>
+            </a:r>
+          </a:p>
+          <a:p>
+            <a:endParaRPr lang="en-US" dirty="0"/>
+          </a:p>
+        </p:txBody>
+      </p:sp>
+      <p:sp>
+        <p:nvSpPr>
+          <p:cNvPr id="4" name="Slide Number Placeholder 3"/>
+          <p:cNvSpPr>
+            <a:spLocks noGrp="1"/>
+          </p:cNvSpPr>
+          <p:nvPr>
+            <p:ph type="sldNum" sz="quarter" idx="5"/>
+          </p:nvPr>
+        </p:nvSpPr>
+        <p:spPr/>
+        <p:txBody>
+          <a:bodyPr/>
+          <a:lstStyle/>
+          <a:p>
+            <a:fld id="{37E24C93-78CA-4AF0-9E77-825D60ABA46D}" type="slidenum">
+              <a:rPr lang="en-US" smtClean="0"/>
+              <a:t>12</a:t>
+            </a:fld>
+            <a:endParaRPr lang="en-US"/>
+          </a:p>
+        </p:txBody>
+      </p:sp>
+    </p:spTree>
+    <p:extLst>
+      <p:ext uri="{BB962C8B-B14F-4D97-AF65-F5344CB8AC3E}">
+        <p14:creationId xmlns:p14="http://schemas.microsoft.com/office/powerpoint/2010/main" val="1477160508"/>
+      </p:ext>
+    </p:extLst>
+  </p:cSld>
+  <p:clrMapOvr>
+    <a:masterClrMapping/>
+  </p:clrMapOvr>
+</p:notes>
+</file>
+
+<file path=ppt/notesSlides/notesSlide11.xml><?xml version="1.0" encoding="utf-8"?>
+<p:notes xmlns:a="http://schemas.openxmlformats.org/drawingml/2006/main" xmlns:r="http://schemas.openxmlformats.org/officeDocument/2006/relationships" xmlns:p="http://schemas.openxmlformats.org/presentationml/2006/main">
+  <p:cSld>
+    <p:spTree>
+      <p:nvGrpSpPr>
+        <p:cNvPr id="1" name=""/>
+        <p:cNvGrpSpPr/>
+        <p:nvPr/>
+      </p:nvGrpSpPr>
+      <p:grpSpPr>
+        <a:xfrm>
+          <a:off x="0" y="0"/>
+          <a:ext cx="0" cy="0"/>
+          <a:chOff x="0" y="0"/>
+          <a:chExt cx="0" cy="0"/>
+        </a:xfrm>
+      </p:grpSpPr>
+      <p:sp>
+        <p:nvSpPr>
+          <p:cNvPr id="2" name="Slide Image Placeholder 1"/>
+          <p:cNvSpPr>
+            <a:spLocks noGrp="1" noRot="1" noChangeAspect="1"/>
+          </p:cNvSpPr>
+          <p:nvPr>
+            <p:ph type="sldImg"/>
+          </p:nvPr>
+        </p:nvSpPr>
+        <p:spPr/>
+      </p:sp>
+      <p:sp>
+        <p:nvSpPr>
+          <p:cNvPr id="3" name="Notes Placeholder 2"/>
+          <p:cNvSpPr>
+            <a:spLocks noGrp="1"/>
+          </p:cNvSpPr>
+          <p:nvPr>
+            <p:ph type="body" idx="1"/>
+          </p:nvPr>
+        </p:nvSpPr>
+        <p:spPr/>
+        <p:txBody>
+          <a:bodyPr/>
+          <a:lstStyle/>
+          <a:p>
+            <a:r>
+              <a:rPr lang="en-IE" b="1" dirty="0"/>
+              <a:t>Talking Points:</a:t>
+            </a:r>
+          </a:p>
+          <a:p>
+            <a:endParaRPr lang="en-IE" dirty="0"/>
+          </a:p>
+          <a:p>
+            <a:r>
+              <a:rPr lang="en-IE" dirty="0"/>
+              <a:t>Next, let’s look at how we can store vector embeddings for use in AI-enabled applications.</a:t>
+            </a:r>
+          </a:p>
+          <a:p>
+            <a:endParaRPr lang="en-GB" dirty="0"/>
+          </a:p>
+        </p:txBody>
+      </p:sp>
+      <p:sp>
+        <p:nvSpPr>
+          <p:cNvPr id="4" name="Slide Number Placeholder 3"/>
+          <p:cNvSpPr>
+            <a:spLocks noGrp="1"/>
+          </p:cNvSpPr>
+          <p:nvPr>
+            <p:ph type="sldNum" sz="quarter" idx="5"/>
+          </p:nvPr>
+        </p:nvSpPr>
+        <p:spPr/>
+        <p:txBody>
+          <a:bodyPr/>
+          <a:lstStyle/>
+          <a:p>
+            <a:fld id="{37E24C93-78CA-4AF0-9E77-825D60ABA46D}" type="slidenum">
+              <a:rPr lang="en-US" smtClean="0"/>
+              <a:t>13</a:t>
+            </a:fld>
+            <a:endParaRPr lang="en-US" dirty="0"/>
+          </a:p>
+        </p:txBody>
+      </p:sp>
+    </p:spTree>
+    <p:extLst>
+      <p:ext uri="{BB962C8B-B14F-4D97-AF65-F5344CB8AC3E}">
+        <p14:creationId xmlns:p14="http://schemas.microsoft.com/office/powerpoint/2010/main" val="2053942289"/>
+      </p:ext>
+    </p:extLst>
+  </p:cSld>
+  <p:clrMapOvr>
+    <a:masterClrMapping/>
+  </p:clrMapOvr>
+</p:notes>
+</file>
+
+<file path=ppt/notesSlides/notesSlide12.xml><?xml version="1.0" encoding="utf-8"?>
+<p:notes xmlns:a="http://schemas.openxmlformats.org/drawingml/2006/main" xmlns:r="http://schemas.openxmlformats.org/officeDocument/2006/relationships" xmlns:p="http://schemas.openxmlformats.org/presentationml/2006/main">
+  <p:cSld>
+    <p:spTree>
+      <p:nvGrpSpPr>
+        <p:cNvPr id="1" name=""/>
+        <p:cNvGrpSpPr/>
+        <p:nvPr/>
+      </p:nvGrpSpPr>
+      <p:grpSpPr>
+        <a:xfrm>
+          <a:off x="0" y="0"/>
+          <a:ext cx="0" cy="0"/>
+          <a:chOff x="0" y="0"/>
+          <a:chExt cx="0" cy="0"/>
+        </a:xfrm>
+      </p:grpSpPr>
+      <p:sp>
+        <p:nvSpPr>
+          <p:cNvPr id="2" name="Slide Image Placeholder 1"/>
+          <p:cNvSpPr>
+            <a:spLocks noGrp="1" noRot="1" noChangeAspect="1"/>
+          </p:cNvSpPr>
+          <p:nvPr>
+            <p:ph type="sldImg"/>
+          </p:nvPr>
+        </p:nvSpPr>
+        <p:spPr/>
+      </p:sp>
+      <p:sp>
+        <p:nvSpPr>
+          <p:cNvPr id="3" name="Notes Placeholder 2"/>
+          <p:cNvSpPr>
+            <a:spLocks noGrp="1"/>
+          </p:cNvSpPr>
+          <p:nvPr>
+            <p:ph type="body" idx="1"/>
+          </p:nvPr>
+        </p:nvSpPr>
+        <p:spPr/>
+        <p:txBody>
+          <a:bodyPr/>
+          <a:lstStyle/>
+          <a:p>
             <a:pPr algn="l"/>
             <a:r>
               <a:rPr lang="en-US" sz="2000" b="0" i="0" dirty="0">
@@ -1162,7 +1371,7 @@
           <a:p>
             <a:fld id="{37E24C93-78CA-4AF0-9E77-825D60ABA46D}" type="slidenum">
               <a:rPr lang="en-US" smtClean="0"/>
-              <a:t>11</a:t>
+              <a:t>14</a:t>
             </a:fld>
             <a:endParaRPr lang="en-US" dirty="0"/>
           </a:p>
@@ -1181,7 +1390,7 @@
 </p:notes>
 </file>
 
-<file path=ppt/notesSlides/notesSlide11.xml><?xml version="1.0" encoding="utf-8"?>
+<file path=ppt/notesSlides/notesSlide13.xml><?xml version="1.0" encoding="utf-8"?>
 <p:notes xmlns:a="http://schemas.openxmlformats.org/drawingml/2006/main" xmlns:r="http://schemas.openxmlformats.org/officeDocument/2006/relationships" xmlns:p="http://schemas.openxmlformats.org/presentationml/2006/main">
   <p:cSld>
     <p:spTree>
@@ -1393,7 +1602,7 @@
                 <a:tabLst/>
                 <a:defRPr/>
               </a:pPr>
-              <a:t>12</a:t>
+              <a:t>15</a:t>
             </a:fld>
             <a:endParaRPr kumimoji="0" lang="en-US" sz="1200" b="0" i="0" u="none" strike="noStrike" kern="1200" cap="none" spc="0" normalizeH="0" baseline="0" noProof="0">
               <a:ln>
@@ -1425,7 +1634,7 @@
 </p:notes>
 </file>
 
-<file path=ppt/notesSlides/notesSlide12.xml><?xml version="1.0" encoding="utf-8"?>
+<file path=ppt/notesSlides/notesSlide14.xml><?xml version="1.0" encoding="utf-8"?>
 <p:notes xmlns:a="http://schemas.openxmlformats.org/drawingml/2006/main" xmlns:r="http://schemas.openxmlformats.org/officeDocument/2006/relationships" xmlns:p="http://schemas.openxmlformats.org/presentationml/2006/main">
   <p:cSld>
     <p:spTree>
@@ -1639,7 +1848,7 @@
           <a:p>
             <a:fld id="{37E24C93-78CA-4AF0-9E77-825D60ABA46D}" type="slidenum">
               <a:rPr lang="en-US" smtClean="0"/>
-              <a:t>13</a:t>
+              <a:t>16</a:t>
             </a:fld>
             <a:endParaRPr lang="en-US" dirty="0"/>
           </a:p>
@@ -1658,7 +1867,7 @@
 </p:notes>
 </file>
 
-<file path=ppt/notesSlides/notesSlide13.xml><?xml version="1.0" encoding="utf-8"?>
+<file path=ppt/notesSlides/notesSlide15.xml><?xml version="1.0" encoding="utf-8"?>
 <p:notes xmlns:a="http://schemas.openxmlformats.org/drawingml/2006/main" xmlns:r="http://schemas.openxmlformats.org/officeDocument/2006/relationships" xmlns:p="http://schemas.openxmlformats.org/presentationml/2006/main">
   <p:cSld>
     <p:spTree>
@@ -1753,7 +1962,7 @@
           <a:p>
             <a:fld id="{37E24C93-78CA-4AF0-9E77-825D60ABA46D}" type="slidenum">
               <a:rPr lang="en-US" smtClean="0"/>
-              <a:t>14</a:t>
+              <a:t>17</a:t>
             </a:fld>
             <a:endParaRPr lang="en-US" dirty="0"/>
           </a:p>
@@ -1772,7 +1981,7 @@
 </p:notes>
 </file>
 
-<file path=ppt/notesSlides/notesSlide14.xml><?xml version="1.0" encoding="utf-8"?>
+<file path=ppt/notesSlides/notesSlide16.xml><?xml version="1.0" encoding="utf-8"?>
 <p:notes xmlns:a="http://schemas.openxmlformats.org/drawingml/2006/main" xmlns:r="http://schemas.openxmlformats.org/officeDocument/2006/relationships" xmlns:p="http://schemas.openxmlformats.org/presentationml/2006/main">
   <p:cSld>
     <p:spTree>
@@ -2172,7 +2381,7 @@
                 <a:tabLst/>
                 <a:defRPr/>
               </a:pPr>
-              <a:t>15</a:t>
+              <a:t>18</a:t>
             </a:fld>
             <a:endParaRPr kumimoji="0" lang="en-US" sz="1800" b="0" i="0" u="none" strike="noStrike" kern="0" cap="none" spc="0" normalizeH="0" baseline="0" noProof="0" dirty="0">
               <a:ln>
@@ -2204,7 +2413,7 @@
 </p:notes>
 </file>
 
-<file path=ppt/notesSlides/notesSlide15.xml><?xml version="1.0" encoding="utf-8"?>
+<file path=ppt/notesSlides/notesSlide17.xml><?xml version="1.0" encoding="utf-8"?>
 <p:notes xmlns:a="http://schemas.openxmlformats.org/drawingml/2006/main" xmlns:r="http://schemas.openxmlformats.org/officeDocument/2006/relationships" xmlns:p="http://schemas.openxmlformats.org/presentationml/2006/main">
   <p:cSld>
     <p:spTree>
@@ -2490,7 +2699,7 @@
                 <a:tabLst/>
                 <a:defRPr/>
               </a:pPr>
-              <a:t>16</a:t>
+              <a:t>19</a:t>
             </a:fld>
             <a:endParaRPr kumimoji="0" lang="en-US" sz="1800" b="0" i="0" u="none" strike="noStrike" kern="0" cap="none" spc="0" normalizeH="0" baseline="0" noProof="0" dirty="0">
               <a:ln>
@@ -2522,7 +2731,7 @@
 </p:notes>
 </file>
 
-<file path=ppt/notesSlides/notesSlide16.xml><?xml version="1.0" encoding="utf-8"?>
+<file path=ppt/notesSlides/notesSlide18.xml><?xml version="1.0" encoding="utf-8"?>
 <p:notes xmlns:a="http://schemas.openxmlformats.org/drawingml/2006/main" xmlns:r="http://schemas.openxmlformats.org/officeDocument/2006/relationships" xmlns:p="http://schemas.openxmlformats.org/presentationml/2006/main">
   <p:cSld>
     <p:spTree>
@@ -2656,7 +2865,7 @@
           <a:p>
             <a:fld id="{37E24C93-78CA-4AF0-9E77-825D60ABA46D}" type="slidenum">
               <a:rPr lang="en-US" smtClean="0"/>
-              <a:t>17</a:t>
+              <a:t>20</a:t>
             </a:fld>
             <a:endParaRPr lang="en-US" dirty="0"/>
           </a:p>
@@ -3690,26 +3899,84 @@
           <a:bodyPr/>
           <a:lstStyle/>
           <a:p>
-            <a:pPr marL="0" marR="0" lvl="0" indent="0" algn="l" defTabSz="914400" rtl="0" eaLnBrk="1" fontAlgn="auto" latinLnBrk="0" hangingPunct="1">
-              <a:lnSpc>
-                <a:spcPct val="100000"/>
-              </a:lnSpc>
-              <a:spcBef>
-                <a:spcPts val="0"/>
-              </a:spcBef>
-              <a:spcAft>
-                <a:spcPts val="0"/>
-              </a:spcAft>
-              <a:buClrTx/>
-              <a:buSzTx/>
-              <a:buFontTx/>
-              <a:buNone/>
-              <a:tabLst/>
-              <a:defRPr/>
+            <a:pPr algn="l"/>
+            <a:r>
+              <a:rPr lang="en-US" b="1" i="0" dirty="0">
+                <a:solidFill>
+                  <a:srgbClr val="ECECF1"/>
+                </a:solidFill>
+                <a:effectLst/>
+                <a:latin typeface="Söhne"/>
+              </a:rPr>
+              <a:t>Benefits of RAG</a:t>
+            </a:r>
+            <a:r>
+              <a:rPr lang="en-US" b="0" i="0" dirty="0">
+                <a:solidFill>
+                  <a:srgbClr val="ECECF1"/>
+                </a:solidFill>
+                <a:effectLst/>
+                <a:latin typeface="Söhne"/>
+              </a:rPr>
+              <a:t>:</a:t>
+            </a:r>
+          </a:p>
+          <a:p>
+            <a:pPr algn="l"/>
+            <a:endParaRPr lang="en-US" b="0" i="0" dirty="0">
+              <a:solidFill>
+                <a:srgbClr val="ECECF1"/>
+              </a:solidFill>
+              <a:effectLst/>
+              <a:latin typeface="Söhne"/>
+            </a:endParaRPr>
+          </a:p>
+          <a:p>
+            <a:pPr marL="171450" indent="-171450" algn="l">
+              <a:buFont typeface="Arial" panose="020B0604020202020204" pitchFamily="34" charset="0"/>
+              <a:buChar char="•"/>
             </a:pPr>
             <a:r>
-              <a:rPr lang="en-US" dirty="0"/>
-              <a:t>https://beta.openai.com/docs/guides/embeddings/use-cases</a:t>
+              <a:rPr lang="en-US" b="0" i="0" dirty="0">
+                <a:solidFill>
+                  <a:srgbClr val="ECECF1"/>
+                </a:solidFill>
+                <a:effectLst/>
+                <a:latin typeface="Söhne"/>
+              </a:rPr>
+              <a:t>Enhanced Accuracy: "By grounding responses in retrieved data, RAG improves the factual accuracy of the answers."</a:t>
+            </a:r>
+          </a:p>
+          <a:p>
+            <a:pPr marL="171450" indent="-171450" algn="l">
+              <a:buFont typeface="Arial" panose="020B0604020202020204" pitchFamily="34" charset="0"/>
+              <a:buChar char="•"/>
+            </a:pPr>
+            <a:r>
+              <a:rPr lang="en-US" b="0" i="0" dirty="0">
+                <a:solidFill>
+                  <a:srgbClr val="ECECF1"/>
+                </a:solidFill>
+                <a:effectLst/>
+                <a:latin typeface="Söhne"/>
+              </a:rPr>
+              <a:t>Contextual Relevance: "Provides responses that are more relevant and tailored to specific queries."</a:t>
+            </a:r>
+          </a:p>
+          <a:p>
+            <a:pPr marL="171450" indent="-171450" algn="l">
+              <a:buFont typeface="Arial" panose="020B0604020202020204" pitchFamily="34" charset="0"/>
+              <a:buChar char="•"/>
+            </a:pPr>
+            <a:r>
+              <a:rPr lang="en-US" b="0" i="0" dirty="0">
+                <a:solidFill>
+                  <a:srgbClr val="ECECF1"/>
+                </a:solidFill>
+                <a:effectLst/>
+                <a:latin typeface="Söhne"/>
+              </a:rPr>
+              <a:t>Scalability: "Allows handling of diverse queries by leveraging a broad range of pre-existing data sources."</a:t>
             </a:r>
           </a:p>
           <a:p>
@@ -3732,7 +3999,7 @@
           <a:bodyPr/>
           <a:lstStyle/>
           <a:p>
-            <a:fld id="{37E24C93-78CA-4AF0-9E77-825D60ABA46D}" type="slidenum">
+            <a:fld id="{94C31905-6920-4800-95F2-38E88A713CCB}" type="slidenum">
               <a:rPr lang="en-US" smtClean="0"/>
               <a:t>9</a:t>
             </a:fld>
@@ -3743,7 +4010,7 @@
     </p:spTree>
     <p:extLst>
       <p:ext uri="{BB962C8B-B14F-4D97-AF65-F5344CB8AC3E}">
-        <p14:creationId xmlns:p14="http://schemas.microsoft.com/office/powerpoint/2010/main" val="1477160508"/>
+        <p14:creationId xmlns:p14="http://schemas.microsoft.com/office/powerpoint/2010/main" val="1122011485"/>
       </p:ext>
     </p:extLst>
   </p:cSld>
@@ -3797,22 +4064,693 @@
           <a:bodyPr/>
           <a:lstStyle/>
           <a:p>
-            <a:r>
-              <a:rPr lang="en-IE" b="1" dirty="0"/>
-              <a:t>Talking Points:</a:t>
-            </a:r>
-          </a:p>
-          <a:p>
-            <a:endParaRPr lang="en-IE" dirty="0"/>
-          </a:p>
-          <a:p>
-            <a:r>
-              <a:rPr lang="en-IE" dirty="0"/>
-              <a:t>Next, let’s look at how we can store vector embeddings for use in AI-enabled applications.</a:t>
-            </a:r>
-          </a:p>
-          <a:p>
-            <a:endParaRPr lang="en-GB" dirty="0"/>
+            <a:pPr algn="l">
+              <a:buFont typeface="+mj-lt"/>
+              <a:buAutoNum type="arabicPeriod"/>
+            </a:pPr>
+            <a:r>
+              <a:rPr lang="en-US" b="1" i="0" dirty="0">
+                <a:effectLst/>
+                <a:latin typeface="Söhne"/>
+              </a:rPr>
+              <a:t> Static index or knowledge base</a:t>
+            </a:r>
+            <a:r>
+              <a:rPr lang="en-US" b="0" i="0" dirty="0">
+                <a:effectLst/>
+                <a:latin typeface="Söhne"/>
+              </a:rPr>
+              <a:t>:</a:t>
+            </a:r>
+          </a:p>
+          <a:p>
+            <a:pPr marL="457200" lvl="1" indent="0" algn="l">
+              <a:buNone/>
+            </a:pPr>
+            <a:r>
+              <a:rPr lang="en-US" b="0" i="0" dirty="0">
+                <a:effectLst/>
+                <a:latin typeface="Söhne"/>
+              </a:rPr>
+              <a:t>Vector indexes in RAG are typically built on a static set of documents or data sources. This means they might not reflect the most current information or emerging trends, unlike </a:t>
+            </a:r>
+            <a:r>
+              <a:rPr lang="en-US" b="0" i="0" dirty="0" err="1">
+                <a:effectLst/>
+                <a:latin typeface="Söhne"/>
+              </a:rPr>
+              <a:t>ReAct</a:t>
+            </a:r>
+            <a:r>
+              <a:rPr lang="en-US" b="0" i="0" dirty="0">
+                <a:effectLst/>
+                <a:latin typeface="Söhne"/>
+              </a:rPr>
+              <a:t>, which can access real-time data from external sources.</a:t>
+            </a:r>
+          </a:p>
+          <a:p>
+            <a:pPr marL="0" marR="0" lvl="0" indent="0" algn="l" defTabSz="914400" rtl="0" eaLnBrk="1" fontAlgn="auto" latinLnBrk="0" hangingPunct="1">
+              <a:lnSpc>
+                <a:spcPct val="100000"/>
+              </a:lnSpc>
+              <a:spcBef>
+                <a:spcPts val="0"/>
+              </a:spcBef>
+              <a:spcAft>
+                <a:spcPts val="0"/>
+              </a:spcAft>
+              <a:buClrTx/>
+              <a:buSzTx/>
+              <a:buFont typeface="+mj-lt"/>
+              <a:buAutoNum type="arabicPeriod"/>
+              <a:tabLst/>
+              <a:defRPr/>
+            </a:pPr>
+            <a:r>
+              <a:rPr lang="en-US" b="1" i="0" dirty="0">
+                <a:effectLst/>
+                <a:latin typeface="Söhne"/>
+              </a:rPr>
+              <a:t> Limited scope of knowledge/contextual adaptation</a:t>
+            </a:r>
+            <a:r>
+              <a:rPr lang="en-US" b="0" i="0" dirty="0">
+                <a:effectLst/>
+                <a:latin typeface="Söhne"/>
+              </a:rPr>
+              <a:t>:</a:t>
+            </a:r>
+          </a:p>
+          <a:p>
+            <a:pPr marL="457200" lvl="1" indent="0" algn="l">
+              <a:buNone/>
+            </a:pPr>
+            <a:r>
+              <a:rPr lang="en-US" b="0" i="0" dirty="0">
+                <a:effectLst/>
+                <a:latin typeface="Söhne"/>
+              </a:rPr>
+              <a:t>The knowledge base of a RAG model is limited to the information contained within its indexed dataset. In contrast, </a:t>
+            </a:r>
+            <a:r>
+              <a:rPr lang="en-US" b="0" i="0" dirty="0" err="1">
+                <a:effectLst/>
+                <a:latin typeface="Söhne"/>
+              </a:rPr>
+              <a:t>ReAct</a:t>
+            </a:r>
+            <a:r>
+              <a:rPr lang="en-US" b="0" i="0" dirty="0">
+                <a:effectLst/>
+                <a:latin typeface="Söhne"/>
+              </a:rPr>
+              <a:t> can potentially access a much broader range of information from external databases or the internet, allowing for more comprehensive and up-to-date responses.</a:t>
+            </a:r>
+          </a:p>
+          <a:p>
+            <a:pPr algn="l">
+              <a:buFont typeface="+mj-lt"/>
+              <a:buAutoNum type="arabicPeriod"/>
+            </a:pPr>
+            <a:r>
+              <a:rPr lang="en-US" b="1" i="0" dirty="0">
+                <a:effectLst/>
+                <a:latin typeface="Söhne"/>
+              </a:rPr>
+              <a:t> Difficulty in index maintenance</a:t>
+            </a:r>
+            <a:r>
+              <a:rPr lang="en-US" b="0" i="0" dirty="0">
+                <a:effectLst/>
+                <a:latin typeface="Söhne"/>
+              </a:rPr>
+              <a:t>:</a:t>
+            </a:r>
+          </a:p>
+          <a:p>
+            <a:pPr marL="457200" lvl="1" indent="0" algn="l">
+              <a:buNone/>
+            </a:pPr>
+            <a:r>
+              <a:rPr lang="en-US" b="0" i="0" dirty="0">
+                <a:effectLst/>
+                <a:latin typeface="Söhne"/>
+              </a:rPr>
+              <a:t>Maintaining and updating vector indexes can be challenging and resource-intensive. The process often requires re-indexing to incorporate new data, which is not as efficient as the continual learning and updating mechanisms in </a:t>
+            </a:r>
+            <a:r>
+              <a:rPr lang="en-US" b="0" i="0" dirty="0" err="1">
+                <a:effectLst/>
+                <a:latin typeface="Söhne"/>
+              </a:rPr>
+              <a:t>ReAct</a:t>
+            </a:r>
+            <a:r>
+              <a:rPr lang="en-US" b="0" i="0" dirty="0">
+                <a:effectLst/>
+                <a:latin typeface="Söhne"/>
+              </a:rPr>
+              <a:t>.</a:t>
+            </a:r>
+          </a:p>
+          <a:p>
+            <a:pPr algn="l">
+              <a:buFont typeface="+mj-lt"/>
+              <a:buAutoNum type="arabicPeriod"/>
+            </a:pPr>
+            <a:r>
+              <a:rPr lang="en-US" b="1" i="0" dirty="0">
+                <a:effectLst/>
+                <a:latin typeface="Söhne"/>
+              </a:rPr>
+              <a:t> Scalability concerns</a:t>
+            </a:r>
+            <a:r>
+              <a:rPr lang="en-US" b="0" i="0" dirty="0">
+                <a:effectLst/>
+                <a:latin typeface="Söhne"/>
+              </a:rPr>
+              <a:t>:</a:t>
+            </a:r>
+          </a:p>
+          <a:p>
+            <a:pPr marL="457200" lvl="1" indent="0" algn="l">
+              <a:buNone/>
+            </a:pPr>
+            <a:r>
+              <a:rPr lang="en-US" b="0" i="0" dirty="0">
+                <a:effectLst/>
+                <a:latin typeface="Söhne"/>
+              </a:rPr>
+              <a:t>As the amount of data grows, the size and complexity of vector indexes also increase. This can lead to challenges in scaling the system efficiently, a problem less pronounced in </a:t>
+            </a:r>
+            <a:r>
+              <a:rPr lang="en-US" b="0" i="0" dirty="0" err="1">
+                <a:effectLst/>
+                <a:latin typeface="Söhne"/>
+              </a:rPr>
+              <a:t>ReAct</a:t>
+            </a:r>
+            <a:r>
+              <a:rPr lang="en-US" b="0" i="0" dirty="0">
+                <a:effectLst/>
+                <a:latin typeface="Söhne"/>
+              </a:rPr>
+              <a:t> which can dynamically interact with scalable external data sources.</a:t>
+            </a:r>
+          </a:p>
+          <a:p>
+            <a:pPr algn="l">
+              <a:buFont typeface="+mj-lt"/>
+              <a:buAutoNum type="arabicPeriod"/>
+            </a:pPr>
+            <a:r>
+              <a:rPr lang="en-US" b="1" i="0" dirty="0">
+                <a:effectLst/>
+                <a:latin typeface="Söhne"/>
+              </a:rPr>
+              <a:t> Relevance and accuracy issues</a:t>
+            </a:r>
+            <a:r>
+              <a:rPr lang="en-US" b="0" i="0" dirty="0">
+                <a:effectLst/>
+                <a:latin typeface="Söhne"/>
+              </a:rPr>
+              <a:t>:</a:t>
+            </a:r>
+          </a:p>
+          <a:p>
+            <a:pPr marL="457200" lvl="1" indent="0" algn="l">
+              <a:buNone/>
+            </a:pPr>
+            <a:r>
+              <a:rPr lang="en-US" b="0" i="0" dirty="0">
+                <a:effectLst/>
+                <a:latin typeface="Söhne"/>
+              </a:rPr>
+              <a:t>The effectiveness of a RAG model's response depends heavily on the quality and relevance of its indexed data. If the index contains outdated, biased, or inaccurate information, it will directly impact the quality of the generated output. </a:t>
+            </a:r>
+            <a:r>
+              <a:rPr lang="en-US" b="0" i="0" dirty="0" err="1">
+                <a:effectLst/>
+                <a:latin typeface="Söhne"/>
+              </a:rPr>
+              <a:t>ReAct</a:t>
+            </a:r>
+            <a:r>
+              <a:rPr lang="en-US" b="0" i="0" dirty="0">
+                <a:effectLst/>
+                <a:latin typeface="Söhne"/>
+              </a:rPr>
+              <a:t>, with its ability to source current information, may offer more accurate and relevant responses.</a:t>
+            </a:r>
+          </a:p>
+          <a:p>
+            <a:pPr algn="l">
+              <a:buFont typeface="+mj-lt"/>
+              <a:buAutoNum type="arabicPeriod"/>
+            </a:pPr>
+            <a:r>
+              <a:rPr lang="en-US" b="1" i="0" dirty="0">
+                <a:effectLst/>
+                <a:latin typeface="Söhne"/>
+              </a:rPr>
+              <a:t> Computational overhead in indexing</a:t>
+            </a:r>
+            <a:r>
+              <a:rPr lang="en-US" b="0" i="0" dirty="0">
+                <a:effectLst/>
+                <a:latin typeface="Söhne"/>
+              </a:rPr>
+              <a:t>:</a:t>
+            </a:r>
+          </a:p>
+          <a:p>
+            <a:pPr marL="457200" lvl="1" indent="0" algn="l">
+              <a:buNone/>
+            </a:pPr>
+            <a:r>
+              <a:rPr lang="en-US" b="0" i="0" dirty="0">
+                <a:effectLst/>
+                <a:latin typeface="Söhne"/>
+              </a:rPr>
+              <a:t>Building and querying large-scale vector indexes can be computationally expensive, which might affect the overall efficiency of the RAG system. </a:t>
+            </a:r>
+            <a:r>
+              <a:rPr lang="en-US" b="0" i="0" dirty="0" err="1">
+                <a:effectLst/>
+                <a:latin typeface="Söhne"/>
+              </a:rPr>
+              <a:t>ReAct</a:t>
+            </a:r>
+            <a:r>
+              <a:rPr lang="en-US" b="0" i="0" dirty="0">
+                <a:effectLst/>
+                <a:latin typeface="Söhne"/>
+              </a:rPr>
+              <a:t> can potentially mitigate some of this overhead by directly querying external databases or resources.</a:t>
+            </a:r>
+          </a:p>
+          <a:p>
+            <a:pPr algn="l">
+              <a:buFont typeface="+mj-lt"/>
+              <a:buAutoNum type="arabicPeriod"/>
+            </a:pPr>
+            <a:r>
+              <a:rPr lang="en-US" b="1" i="0" dirty="0">
+                <a:effectLst/>
+                <a:latin typeface="Söhne"/>
+              </a:rPr>
+              <a:t> Limited adaptability</a:t>
+            </a:r>
+            <a:r>
+              <a:rPr lang="en-US" b="0" i="0" dirty="0">
+                <a:effectLst/>
+                <a:latin typeface="Söhne"/>
+              </a:rPr>
+              <a:t>:</a:t>
+            </a:r>
+          </a:p>
+          <a:p>
+            <a:pPr marL="457200" lvl="1" indent="0" algn="l">
+              <a:buNone/>
+            </a:pPr>
+            <a:r>
+              <a:rPr lang="en-US" b="0" i="0" dirty="0">
+                <a:effectLst/>
+                <a:latin typeface="Söhne"/>
+              </a:rPr>
+              <a:t>RAG systems are less adaptable to novel or unexpected queries that fall outside their indexed knowledge base. </a:t>
+            </a:r>
+            <a:r>
+              <a:rPr lang="en-US" b="0" i="0" dirty="0" err="1">
+                <a:effectLst/>
+                <a:latin typeface="Söhne"/>
+              </a:rPr>
+              <a:t>ReAct's</a:t>
+            </a:r>
+            <a:r>
+              <a:rPr lang="en-US" b="0" i="0" dirty="0">
+                <a:effectLst/>
+                <a:latin typeface="Söhne"/>
+              </a:rPr>
+              <a:t> ability to interact with a range of external environments allows it to handle a wider variety of queries more flexibly.</a:t>
+            </a:r>
+          </a:p>
+          <a:p>
+            <a:pPr algn="l">
+              <a:buFont typeface="+mj-lt"/>
+              <a:buAutoNum type="arabicPeriod"/>
+            </a:pPr>
+            <a:r>
+              <a:rPr lang="en-US" b="1" i="0" dirty="0">
+                <a:effectLst/>
+                <a:latin typeface="Söhne"/>
+              </a:rPr>
+              <a:t> Multi-turn Q&amp;A</a:t>
+            </a:r>
+            <a:r>
+              <a:rPr lang="en-US" b="0" i="0" dirty="0">
+                <a:effectLst/>
+                <a:latin typeface="Söhne"/>
+              </a:rPr>
+              <a:t>:</a:t>
+            </a:r>
+          </a:p>
+          <a:p>
+            <a:pPr marL="457200" lvl="1" indent="0" algn="l">
+              <a:buNone/>
+            </a:pPr>
+            <a:r>
+              <a:rPr lang="en-US" b="0" i="0" dirty="0">
+                <a:effectLst/>
+                <a:latin typeface="Söhne"/>
+              </a:rPr>
+              <a:t>A single round of information retrieval falls apart when we need reasoning. For example, “What bikes do you sell that are popular with kids in Colorado?” Product, customer demographic, and sales data likely reside within different data sources, requiring reasoning beyond simple similarity searching.</a:t>
+            </a:r>
+          </a:p>
+          <a:p>
+            <a:pPr algn="l">
+              <a:buFont typeface="+mj-lt"/>
+              <a:buAutoNum type="arabicPeriod"/>
+            </a:pPr>
+            <a:r>
+              <a:rPr lang="en-US" b="1" i="0" dirty="0">
+                <a:effectLst/>
+                <a:latin typeface="Söhne"/>
+              </a:rPr>
+              <a:t> Information loss</a:t>
+            </a:r>
+            <a:r>
+              <a:rPr lang="en-US" b="0" i="0" dirty="0">
+                <a:effectLst/>
+                <a:latin typeface="Söhne"/>
+              </a:rPr>
+              <a:t>:</a:t>
+            </a:r>
+          </a:p>
+          <a:p>
+            <a:pPr marL="457200" lvl="1" indent="0" algn="l">
+              <a:buNone/>
+            </a:pPr>
+            <a:r>
+              <a:rPr lang="en-US" b="0" i="0" dirty="0">
+                <a:effectLst/>
+                <a:latin typeface="Söhne"/>
+              </a:rPr>
+              <a:t>The process of breaking down text into chunks and then generating embeddings is inherently lossy. The selection of chunk size can lead to the omission of relevant context, and the embeddings might not fully capture the nuances of the original text, leading to potential information loss.</a:t>
+            </a:r>
+          </a:p>
+          <a:p>
+            <a:pPr marL="457200" lvl="1" indent="0" algn="l">
+              <a:buNone/>
+            </a:pPr>
+            <a:endParaRPr lang="en-US" b="0" i="0" dirty="0">
+              <a:effectLst/>
+              <a:latin typeface="Söhne"/>
+            </a:endParaRPr>
+          </a:p>
+          <a:p>
+            <a:pPr marL="457200" lvl="1" indent="0" algn="l">
+              <a:buNone/>
+            </a:pPr>
+            <a:r>
+              <a:rPr lang="en-US" b="0" i="0" dirty="0">
+                <a:effectLst/>
+                <a:latin typeface="Söhne"/>
+              </a:rPr>
+              <a:t>The retrieval step, constrained by the </a:t>
+            </a:r>
+            <a:r>
+              <a:rPr lang="en-US" b="0" i="0" dirty="0" err="1">
+                <a:effectLst/>
+                <a:latin typeface="Söhne"/>
+              </a:rPr>
+              <a:t>top_k</a:t>
+            </a:r>
+            <a:r>
+              <a:rPr lang="en-US" b="0" i="0" dirty="0">
+                <a:effectLst/>
+                <a:latin typeface="Söhne"/>
+              </a:rPr>
+              <a:t> selection and the limitations of the similarity function, can further contribute to information loss. Important pieces of information might not be retrieved if they are not among the </a:t>
+            </a:r>
+            <a:r>
+              <a:rPr lang="en-US" b="0" i="0" dirty="0" err="1">
+                <a:effectLst/>
+                <a:latin typeface="Söhne"/>
+              </a:rPr>
+              <a:t>top_k</a:t>
+            </a:r>
+            <a:r>
+              <a:rPr lang="en-US" b="0" i="0" dirty="0">
+                <a:effectLst/>
+                <a:latin typeface="Söhne"/>
+              </a:rPr>
+              <a:t> results or if the similarity function fails to recognize their relevance.</a:t>
+            </a:r>
+          </a:p>
+          <a:p>
+            <a:pPr marL="457200" lvl="1" indent="0" algn="l">
+              <a:buNone/>
+            </a:pPr>
+            <a:endParaRPr lang="en-US" b="0" i="0" dirty="0">
+              <a:effectLst/>
+              <a:latin typeface="Söhne"/>
+            </a:endParaRPr>
+          </a:p>
+          <a:p>
+            <a:pPr marL="457200" lvl="1" indent="0" algn="l">
+              <a:buNone/>
+            </a:pPr>
+            <a:r>
+              <a:rPr lang="en-US" b="0" i="0" dirty="0">
+                <a:effectLst/>
+                <a:latin typeface="Söhne"/>
+              </a:rPr>
+              <a:t>The response generation process is also subject to limitations, such as the length of content it can effectively handle and the capabilities of the generative LLM. This could result in the generation of responses that lack depth or miss critical information from the source chunks.</a:t>
+            </a:r>
+          </a:p>
+          <a:p>
+            <a:pPr marL="457200" lvl="1" indent="0" algn="l">
+              <a:buNone/>
+            </a:pPr>
+            <a:endParaRPr lang="en-US" b="0" i="0" dirty="0">
+              <a:effectLst/>
+              <a:latin typeface="Söhne"/>
+            </a:endParaRPr>
+          </a:p>
+          <a:p>
+            <a:pPr marL="457200" lvl="1" indent="0" algn="l">
+              <a:buNone/>
+            </a:pPr>
+            <a:endParaRPr lang="en-US" b="0" i="0" dirty="0">
+              <a:effectLst/>
+              <a:latin typeface="Söhne"/>
+            </a:endParaRPr>
+          </a:p>
+          <a:p>
+            <a:pPr algn="l">
+              <a:buFont typeface="+mj-lt"/>
+              <a:buNone/>
+            </a:pPr>
+            <a:r>
+              <a:rPr lang="en-US" dirty="0"/>
+              <a:t>More notes on the multi-hop Q&amp;A limitation in the RAG pattern:</a:t>
+            </a:r>
+            <a:br>
+              <a:rPr lang="en-US" dirty="0"/>
+            </a:br>
+            <a:endParaRPr lang="en-US" b="0" i="0" dirty="0">
+              <a:effectLst/>
+              <a:latin typeface="Söhne"/>
+            </a:endParaRPr>
+          </a:p>
+          <a:p>
+            <a:pPr lvl="0" algn="l">
+              <a:buFont typeface="+mj-lt"/>
+              <a:buAutoNum type="arabicPeriod"/>
+            </a:pPr>
+            <a:r>
+              <a:rPr lang="en-US" b="1" i="0" dirty="0">
+                <a:effectLst/>
+                <a:latin typeface="Söhne"/>
+              </a:rPr>
+              <a:t> Single-Layered Retrieval:</a:t>
+            </a:r>
+          </a:p>
+          <a:p>
+            <a:pPr lvl="1" algn="l">
+              <a:buFont typeface="+mj-lt"/>
+              <a:buNone/>
+            </a:pPr>
+            <a:r>
+              <a:rPr lang="en-US" b="0" i="0" dirty="0">
+                <a:effectLst/>
+                <a:latin typeface="Söhne"/>
+              </a:rPr>
+              <a:t>RAG typically operates on a single layer of retrieval, fetching information based on direct query-to-document similarity. This approach is less effective for queries that require synthesizing information across multiple data points or "hops."</a:t>
+            </a:r>
+            <a:endParaRPr lang="en-US" b="1" i="0" dirty="0">
+              <a:effectLst/>
+              <a:latin typeface="Söhne"/>
+            </a:endParaRPr>
+          </a:p>
+          <a:p>
+            <a:pPr algn="l">
+              <a:buFont typeface="+mj-lt"/>
+              <a:buAutoNum type="arabicPeriod"/>
+            </a:pPr>
+            <a:r>
+              <a:rPr lang="en-US" b="1" i="0" dirty="0">
+                <a:effectLst/>
+                <a:latin typeface="Söhne"/>
+              </a:rPr>
+              <a:t> Complex Query Example</a:t>
+            </a:r>
+            <a:r>
+              <a:rPr lang="en-US" b="0" i="0" dirty="0">
+                <a:effectLst/>
+                <a:latin typeface="Söhne"/>
+              </a:rPr>
+              <a:t>:</a:t>
+            </a:r>
+          </a:p>
+          <a:p>
+            <a:pPr marL="457200" lvl="1" indent="0" algn="l">
+              <a:buFont typeface="+mj-lt"/>
+              <a:buNone/>
+            </a:pPr>
+            <a:r>
+              <a:rPr lang="en-US" b="0" i="0" dirty="0">
+                <a:effectLst/>
+                <a:latin typeface="Söhne"/>
+              </a:rPr>
+              <a:t>The example query, “What bikes do you sell that are popular with kids in Colorado?” involves multiple layers of reasoning: identifying products (bikes), understanding a specific customer demographic (kids in Colorado), and analyzing sales data. RAG's single retrieval round may not effectively capture this multi-faceted relationship.</a:t>
+            </a:r>
+          </a:p>
+          <a:p>
+            <a:pPr algn="l">
+              <a:buFont typeface="+mj-lt"/>
+              <a:buAutoNum type="arabicPeriod"/>
+            </a:pPr>
+            <a:r>
+              <a:rPr lang="en-US" b="1" i="0" dirty="0">
+                <a:effectLst/>
+                <a:latin typeface="Söhne"/>
+              </a:rPr>
+              <a:t> Reasoning and Data Correlation</a:t>
+            </a:r>
+            <a:r>
+              <a:rPr lang="en-US" b="0" i="0" dirty="0">
+                <a:effectLst/>
+                <a:latin typeface="Söhne"/>
+              </a:rPr>
+              <a:t>:</a:t>
+            </a:r>
+          </a:p>
+          <a:p>
+            <a:pPr marL="457200" lvl="1" indent="0" algn="l">
+              <a:buFont typeface="+mj-lt"/>
+              <a:buNone/>
+            </a:pPr>
+            <a:r>
+              <a:rPr lang="en-US" b="0" i="0" dirty="0">
+                <a:effectLst/>
+                <a:latin typeface="Söhne"/>
+              </a:rPr>
+              <a:t>Effective handling of such queries requires correlating data from different sources (product catalog, customer demographics, sales records). RAG's model structure, which primarily relies on finding the most relevant documents or data snippets in one go, may not adequately perform this level of complex reasoning and correlation.</a:t>
+            </a:r>
+          </a:p>
+          <a:p>
+            <a:pPr algn="l">
+              <a:buFont typeface="+mj-lt"/>
+              <a:buAutoNum type="arabicPeriod"/>
+            </a:pPr>
+            <a:r>
+              <a:rPr lang="en-US" b="1" i="0" dirty="0">
+                <a:effectLst/>
+                <a:latin typeface="Söhne"/>
+              </a:rPr>
+              <a:t>Need for Multi-Hop Reasoning</a:t>
+            </a:r>
+            <a:r>
+              <a:rPr lang="en-US" b="0" i="0" dirty="0">
+                <a:effectLst/>
+                <a:latin typeface="Söhne"/>
+              </a:rPr>
+              <a:t>:</a:t>
+            </a:r>
+          </a:p>
+          <a:p>
+            <a:pPr marL="457200" lvl="1" indent="0" algn="l">
+              <a:buFont typeface="+mj-lt"/>
+              <a:buNone/>
+            </a:pPr>
+            <a:r>
+              <a:rPr lang="en-US" b="0" i="0" dirty="0">
+                <a:effectLst/>
+                <a:latin typeface="Söhne"/>
+              </a:rPr>
+              <a:t>The query demands a multi-hop reasoning process, where the system must first understand each element of the query (products, customer preferences, geographical trends) and then combine these insights to form a coherent answer. RAG's architecture is not inherently designed for such iterative or multi-step reasoning processes.</a:t>
+            </a:r>
+          </a:p>
+          <a:p>
+            <a:pPr algn="l">
+              <a:buFont typeface="+mj-lt"/>
+              <a:buAutoNum type="arabicPeriod"/>
+            </a:pPr>
+            <a:r>
+              <a:rPr lang="en-US" b="1" i="0" dirty="0">
+                <a:effectLst/>
+                <a:latin typeface="Söhne"/>
+              </a:rPr>
+              <a:t>Comparison with Advanced Models</a:t>
+            </a:r>
+            <a:r>
+              <a:rPr lang="en-US" b="0" i="0" dirty="0">
+                <a:effectLst/>
+                <a:latin typeface="Söhne"/>
+              </a:rPr>
+              <a:t>:</a:t>
+            </a:r>
+          </a:p>
+          <a:p>
+            <a:pPr marL="457200" lvl="1" indent="0" algn="l">
+              <a:buFont typeface="+mj-lt"/>
+              <a:buNone/>
+            </a:pPr>
+            <a:r>
+              <a:rPr lang="en-US" b="0" i="0" dirty="0">
+                <a:effectLst/>
+                <a:latin typeface="Söhne"/>
+              </a:rPr>
+              <a:t>In contrast to RAG, more advanced models or patterns like </a:t>
+            </a:r>
+            <a:r>
+              <a:rPr lang="en-US" b="0" i="0" dirty="0" err="1">
+                <a:effectLst/>
+                <a:latin typeface="Söhne"/>
+              </a:rPr>
+              <a:t>ReAct</a:t>
+            </a:r>
+            <a:r>
+              <a:rPr lang="en-US" b="0" i="0" dirty="0">
+                <a:effectLst/>
+                <a:latin typeface="Söhne"/>
+              </a:rPr>
+              <a:t> or those specifically designed for multi-hop reasoning might better handle such complex queries. These models can dynamically interact with multiple data sources, update their knowledge, and reason across different data points.</a:t>
+            </a:r>
+          </a:p>
+          <a:p>
+            <a:br>
+              <a:rPr lang="en-US" dirty="0"/>
+            </a:br>
+            <a:endParaRPr lang="en-US" b="0" i="0" dirty="0">
+              <a:effectLst/>
+              <a:latin typeface="Söhne"/>
+            </a:endParaRPr>
           </a:p>
         </p:txBody>
       </p:sp>
@@ -3831,18 +4769,18 @@
           <a:bodyPr/>
           <a:lstStyle/>
           <a:p>
-            <a:fld id="{37E24C93-78CA-4AF0-9E77-825D60ABA46D}" type="slidenum">
+            <a:fld id="{94C31905-6920-4800-95F2-38E88A713CCB}" type="slidenum">
               <a:rPr lang="en-US" smtClean="0"/>
               <a:t>10</a:t>
             </a:fld>
-            <a:endParaRPr lang="en-US" dirty="0"/>
+            <a:endParaRPr lang="en-US"/>
           </a:p>
         </p:txBody>
       </p:sp>
     </p:spTree>
     <p:extLst>
       <p:ext uri="{BB962C8B-B14F-4D97-AF65-F5344CB8AC3E}">
-        <p14:creationId xmlns:p14="http://schemas.microsoft.com/office/powerpoint/2010/main" val="2053942289"/>
+        <p14:creationId xmlns:p14="http://schemas.microsoft.com/office/powerpoint/2010/main" val="2118618495"/>
       </p:ext>
     </p:extLst>
   </p:cSld>
@@ -21167,24 +22105,24 @@
       </p:grpSpPr>
       <p:sp>
         <p:nvSpPr>
-          <p:cNvPr id="6" name="Text Placeholder 5">
-            <a:extLst>
-              <a:ext uri="{FF2B5EF4-FFF2-40B4-BE49-F238E27FC236}">
-                <a16:creationId xmlns:a16="http://schemas.microsoft.com/office/drawing/2014/main" id="{D2D209E3-1837-4C18-AED9-45330F063EC5}"/>
-              </a:ext>
-            </a:extLst>
-          </p:cNvPr>
-          <p:cNvSpPr>
-            <a:spLocks noGrp="1"/>
-          </p:cNvSpPr>
-          <p:nvPr>
-            <p:ph type="body" sz="quarter" idx="10"/>
-          </p:nvPr>
-        </p:nvSpPr>
-        <p:spPr>
-          <a:xfrm>
-            <a:off x="3280756" y="309563"/>
-            <a:ext cx="2377094" cy="2600325"/>
+          <p:cNvPr id="2" name="Title 1">
+            <a:extLst>
+              <a:ext uri="{FF2B5EF4-FFF2-40B4-BE49-F238E27FC236}">
+                <a16:creationId xmlns:a16="http://schemas.microsoft.com/office/drawing/2014/main" id="{DCC18BA6-D095-CB82-842F-C977E6CC7AF9}"/>
+              </a:ext>
+            </a:extLst>
+          </p:cNvPr>
+          <p:cNvSpPr>
+            <a:spLocks noGrp="1"/>
+          </p:cNvSpPr>
+          <p:nvPr>
+            <p:ph type="title"/>
+          </p:nvPr>
+        </p:nvSpPr>
+        <p:spPr>
+          <a:xfrm>
+            <a:off x="652462" y="346076"/>
+            <a:ext cx="10932084" cy="568324"/>
           </a:xfrm>
         </p:spPr>
         <p:txBody>
@@ -21193,31 +22131,31 @@
           <a:p>
             <a:r>
               <a:rPr lang="en-US" dirty="0"/>
-              <a:t>2</a:t>
-            </a:r>
-          </a:p>
-        </p:txBody>
-      </p:sp>
-      <p:sp>
-        <p:nvSpPr>
-          <p:cNvPr id="2" name="Title 1">
-            <a:extLst>
-              <a:ext uri="{FF2B5EF4-FFF2-40B4-BE49-F238E27FC236}">
-                <a16:creationId xmlns:a16="http://schemas.microsoft.com/office/drawing/2014/main" id="{21A99087-F939-4EAF-AD38-211701C7799F}"/>
-              </a:ext>
-            </a:extLst>
-          </p:cNvPr>
-          <p:cNvSpPr>
-            <a:spLocks noGrp="1"/>
-          </p:cNvSpPr>
-          <p:nvPr>
-            <p:ph type="ctrTitle"/>
-          </p:nvPr>
-        </p:nvSpPr>
-        <p:spPr>
-          <a:xfrm>
-            <a:off x="1222712" y="1806388"/>
-            <a:ext cx="4581188" cy="3439389"/>
+              <a:t>And sometimes RAG can be a drag…</a:t>
+            </a:r>
+          </a:p>
+        </p:txBody>
+      </p:sp>
+      <p:sp>
+        <p:nvSpPr>
+          <p:cNvPr id="3" name="Footer Placeholder 2">
+            <a:extLst>
+              <a:ext uri="{FF2B5EF4-FFF2-40B4-BE49-F238E27FC236}">
+                <a16:creationId xmlns:a16="http://schemas.microsoft.com/office/drawing/2014/main" id="{3C27CF1E-AEE0-9677-D81A-9841A441CE17}"/>
+              </a:ext>
+            </a:extLst>
+          </p:cNvPr>
+          <p:cNvSpPr>
+            <a:spLocks noGrp="1"/>
+          </p:cNvSpPr>
+          <p:nvPr>
+            <p:ph type="ftr" sz="quarter" idx="3"/>
+          </p:nvPr>
+        </p:nvSpPr>
+        <p:spPr>
+          <a:xfrm>
+            <a:off x="7234764" y="6466371"/>
+            <a:ext cx="4114800" cy="331932"/>
           </a:xfrm>
         </p:spPr>
         <p:txBody>
@@ -21225,48 +22163,198 @@
           <a:lstStyle/>
           <a:p>
             <a:r>
-              <a:rPr lang="en-GB" dirty="0"/>
-              <a:t>Vector </a:t>
-            </a:r>
-            <a:br>
-              <a:rPr lang="en-GB" dirty="0"/>
-            </a:br>
-            <a:r>
-              <a:rPr lang="en-GB" dirty="0"/>
-              <a:t>Databases</a:t>
-            </a:r>
-          </a:p>
-        </p:txBody>
-      </p:sp>
-      <p:sp>
-        <p:nvSpPr>
-          <p:cNvPr id="5" name="Subtitle 4">
-            <a:extLst>
-              <a:ext uri="{FF2B5EF4-FFF2-40B4-BE49-F238E27FC236}">
-                <a16:creationId xmlns:a16="http://schemas.microsoft.com/office/drawing/2014/main" id="{9AB506EB-3DD2-4EA1-931F-DACECA2540F5}"/>
-              </a:ext>
-            </a:extLst>
-          </p:cNvPr>
-          <p:cNvSpPr>
-            <a:spLocks noGrp="1"/>
-          </p:cNvSpPr>
-          <p:nvPr>
-            <p:ph type="subTitle" idx="1"/>
-          </p:nvPr>
-        </p:nvSpPr>
-        <p:spPr/>
+              <a:rPr lang="en-US"/>
+              <a:t>WWW.SOLLIANCE.NET</a:t>
+            </a:r>
+            <a:endParaRPr lang="en-US" dirty="0"/>
+          </a:p>
+        </p:txBody>
+      </p:sp>
+      <p:sp>
+        <p:nvSpPr>
+          <p:cNvPr id="4" name="Slide Number Placeholder 3">
+            <a:extLst>
+              <a:ext uri="{FF2B5EF4-FFF2-40B4-BE49-F238E27FC236}">
+                <a16:creationId xmlns:a16="http://schemas.microsoft.com/office/drawing/2014/main" id="{A356E74C-C9E3-BA0F-BFF0-61F07ACD9FBF}"/>
+              </a:ext>
+            </a:extLst>
+          </p:cNvPr>
+          <p:cNvSpPr>
+            <a:spLocks noGrp="1"/>
+          </p:cNvSpPr>
+          <p:nvPr>
+            <p:ph type="sldNum" sz="quarter" idx="4"/>
+          </p:nvPr>
+        </p:nvSpPr>
+        <p:spPr>
+          <a:xfrm>
+            <a:off x="11636830" y="6466371"/>
+            <a:ext cx="436355" cy="331932"/>
+          </a:xfrm>
+        </p:spPr>
         <p:txBody>
           <a:bodyPr/>
           <a:lstStyle/>
           <a:p>
-            <a:endParaRPr lang="en-US"/>
+            <a:fld id="{00F9DAA1-1DF7-43E0-8E29-0CE1148553C7}" type="slidenum">
+              <a:rPr lang="en-US" smtClean="0"/>
+              <a:pPr/>
+              <a:t>10</a:t>
+            </a:fld>
+            <a:endParaRPr lang="en-US" dirty="0"/>
+          </a:p>
+        </p:txBody>
+      </p:sp>
+      <p:sp>
+        <p:nvSpPr>
+          <p:cNvPr id="5" name="Text Placeholder 4">
+            <a:extLst>
+              <a:ext uri="{FF2B5EF4-FFF2-40B4-BE49-F238E27FC236}">
+                <a16:creationId xmlns:a16="http://schemas.microsoft.com/office/drawing/2014/main" id="{5DF806D8-76E6-DB00-0FBB-9BFBB286DD5B}"/>
+              </a:ext>
+            </a:extLst>
+          </p:cNvPr>
+          <p:cNvSpPr>
+            <a:spLocks noGrp="1"/>
+          </p:cNvSpPr>
+          <p:nvPr>
+            <p:ph type="body" sz="quarter" idx="10"/>
+          </p:nvPr>
+        </p:nvSpPr>
+        <p:spPr>
+          <a:xfrm>
+            <a:off x="647699" y="1043189"/>
+            <a:ext cx="10932083" cy="4900411"/>
+          </a:xfrm>
+        </p:spPr>
+        <p:txBody>
+          <a:bodyPr>
+            <a:normAutofit/>
+          </a:bodyPr>
+          <a:lstStyle/>
+          <a:p>
+            <a:pPr>
+              <a:buFont typeface="+mj-lt"/>
+              <a:buAutoNum type="arabicPeriod"/>
+            </a:pPr>
+            <a:r>
+              <a:rPr lang="en-US" sz="1050" dirty="0"/>
+              <a:t> RAG retriever relies on a vector index of chunked textual data, which brings with it some issues</a:t>
+            </a:r>
+          </a:p>
+          <a:p>
+            <a:pPr lvl="1">
+              <a:buFont typeface="+mj-lt"/>
+              <a:buAutoNum type="arabicPeriod"/>
+            </a:pPr>
+            <a:r>
+              <a:rPr lang="en-US" sz="1050" dirty="0"/>
+              <a:t>Computational overhead in indexing and index maintenance</a:t>
+            </a:r>
+          </a:p>
+          <a:p>
+            <a:pPr lvl="1">
+              <a:buFont typeface="+mj-lt"/>
+              <a:buAutoNum type="arabicPeriod"/>
+            </a:pPr>
+            <a:r>
+              <a:rPr lang="en-US" sz="1050" dirty="0"/>
+              <a:t>Latency of knowledge caused by offline indexing delay of any new or changed data</a:t>
+            </a:r>
+          </a:p>
+          <a:p>
+            <a:pPr lvl="1">
+              <a:buFont typeface="+mj-lt"/>
+              <a:buAutoNum type="arabicPeriod"/>
+            </a:pPr>
+            <a:r>
+              <a:rPr lang="en-US" sz="1050" dirty="0"/>
+              <a:t>Added vector index and search requirements increase infrastructure complexity and cost</a:t>
+            </a:r>
+          </a:p>
+          <a:p>
+            <a:pPr lvl="1">
+              <a:buFont typeface="+mj-lt"/>
+              <a:buAutoNum type="arabicPeriod"/>
+            </a:pPr>
+            <a:r>
+              <a:rPr lang="en-US" sz="1050" dirty="0"/>
+              <a:t>Information loss due to chunking (since nuance of complete text may be lost) – for a long document some chunks might not be brought back that turn out to be critical, or they may be brought back in the wrong order leading to an incorrect interpretation</a:t>
+            </a:r>
+          </a:p>
+          <a:p>
+            <a:pPr lvl="1">
+              <a:buFont typeface="+mj-lt"/>
+              <a:buAutoNum type="arabicPeriod"/>
+            </a:pPr>
+            <a:r>
+              <a:rPr lang="en-US" sz="1050" dirty="0"/>
+              <a:t>Information loss due to the top k selection of passages and the limitations of the similarity function – important information simply might not be retrieved</a:t>
+            </a:r>
+          </a:p>
+          <a:p>
+            <a:pPr lvl="1">
+              <a:buFont typeface="+mj-lt"/>
+              <a:buAutoNum type="arabicPeriod"/>
+            </a:pPr>
+            <a:r>
+              <a:rPr lang="en-US" sz="1050" dirty="0"/>
+              <a:t>Scope of knowledge/contextual adaptation limited to only what is indexed</a:t>
+            </a:r>
+          </a:p>
+          <a:p>
+            <a:pPr lvl="1">
+              <a:buFont typeface="+mj-lt"/>
+              <a:buAutoNum type="arabicPeriod"/>
+            </a:pPr>
+            <a:r>
+              <a:rPr lang="en-US" sz="1050" dirty="0"/>
+              <a:t>Vector searches are not chronologically aware (time series).</a:t>
+            </a:r>
+          </a:p>
+          <a:p>
+            <a:pPr lvl="1">
+              <a:buFont typeface="+mj-lt"/>
+              <a:buAutoNum type="arabicPeriod"/>
+            </a:pPr>
+            <a:r>
+              <a:rPr lang="en-US" sz="1050" dirty="0"/>
+              <a:t>Vector searches simply use distance measurements between vectors and are very sensitive to language nuances like plural vs. singular.</a:t>
+            </a:r>
+          </a:p>
+          <a:p>
+            <a:pPr lvl="1">
+              <a:buFont typeface="+mj-lt"/>
+              <a:buAutoNum type="arabicPeriod"/>
+            </a:pPr>
+            <a:endParaRPr lang="en-US" sz="1050" dirty="0"/>
+          </a:p>
+          <a:p>
+            <a:pPr>
+              <a:buFont typeface="+mj-lt"/>
+              <a:buAutoNum type="arabicPeriod"/>
+            </a:pPr>
+            <a:r>
+              <a:rPr lang="en-US" sz="1050" dirty="0"/>
+              <a:t>The effectiveness of a RAG enabled model's response depends heavily on the quality and relevance of its indexed data. Poor data retrieval yields hallucinations or inaccurate answers </a:t>
+            </a:r>
+          </a:p>
+          <a:p>
+            <a:pPr>
+              <a:buFont typeface="+mj-lt"/>
+              <a:buAutoNum type="arabicPeriod"/>
+            </a:pPr>
+            <a:r>
+              <a:rPr lang="en-US" sz="1050" dirty="0"/>
+              <a:t>No support for multi-turn instructions (e.g., “What bikes do you sell that are popular with kids in Colorado?” requires possibly several retrieval steps across different data sources)</a:t>
+            </a:r>
           </a:p>
         </p:txBody>
       </p:sp>
     </p:spTree>
     <p:extLst>
       <p:ext uri="{BB962C8B-B14F-4D97-AF65-F5344CB8AC3E}">
-        <p14:creationId xmlns:p14="http://schemas.microsoft.com/office/powerpoint/2010/main" val="2118431511"/>
+        <p14:creationId xmlns:p14="http://schemas.microsoft.com/office/powerpoint/2010/main" val="3089740309"/>
       </p:ext>
     </p:extLst>
   </p:cSld>
@@ -21295,6 +22383,627 @@
       </p:grpSpPr>
       <p:sp>
         <p:nvSpPr>
+          <p:cNvPr id="5" name="Title 4">
+            <a:extLst>
+              <a:ext uri="{FF2B5EF4-FFF2-40B4-BE49-F238E27FC236}">
+                <a16:creationId xmlns:a16="http://schemas.microsoft.com/office/drawing/2014/main" id="{1DEBDF5E-0F20-5B58-5A58-B9258E293D43}"/>
+              </a:ext>
+            </a:extLst>
+          </p:cNvPr>
+          <p:cNvSpPr>
+            <a:spLocks noGrp="1"/>
+          </p:cNvSpPr>
+          <p:nvPr>
+            <p:ph type="title"/>
+          </p:nvPr>
+        </p:nvSpPr>
+        <p:spPr/>
+        <p:txBody>
+          <a:bodyPr/>
+          <a:lstStyle/>
+          <a:p>
+            <a:r>
+              <a:rPr lang="en-US" dirty="0"/>
+              <a:t>LLMs are always forgetting, up to a point</a:t>
+            </a:r>
+          </a:p>
+        </p:txBody>
+      </p:sp>
+      <p:sp>
+        <p:nvSpPr>
+          <p:cNvPr id="3" name="Footer Placeholder 2">
+            <a:extLst>
+              <a:ext uri="{FF2B5EF4-FFF2-40B4-BE49-F238E27FC236}">
+                <a16:creationId xmlns:a16="http://schemas.microsoft.com/office/drawing/2014/main" id="{4F109AB1-208C-BC25-9E8D-218AC6CD6880}"/>
+              </a:ext>
+            </a:extLst>
+          </p:cNvPr>
+          <p:cNvSpPr>
+            <a:spLocks noGrp="1"/>
+          </p:cNvSpPr>
+          <p:nvPr>
+            <p:ph type="ftr" sz="quarter" idx="3"/>
+          </p:nvPr>
+        </p:nvSpPr>
+        <p:spPr/>
+        <p:txBody>
+          <a:bodyPr/>
+          <a:lstStyle/>
+          <a:p>
+            <a:r>
+              <a:rPr lang="en-US"/>
+              <a:t>WWW.SOLLIANCE.NET</a:t>
+            </a:r>
+            <a:endParaRPr lang="en-US" dirty="0"/>
+          </a:p>
+        </p:txBody>
+      </p:sp>
+      <p:sp>
+        <p:nvSpPr>
+          <p:cNvPr id="4" name="Slide Number Placeholder 3">
+            <a:extLst>
+              <a:ext uri="{FF2B5EF4-FFF2-40B4-BE49-F238E27FC236}">
+                <a16:creationId xmlns:a16="http://schemas.microsoft.com/office/drawing/2014/main" id="{9DCE7FB7-A3A5-7C6B-0FA5-2B01888B0B72}"/>
+              </a:ext>
+            </a:extLst>
+          </p:cNvPr>
+          <p:cNvSpPr>
+            <a:spLocks noGrp="1"/>
+          </p:cNvSpPr>
+          <p:nvPr>
+            <p:ph type="sldNum" sz="quarter" idx="4"/>
+          </p:nvPr>
+        </p:nvSpPr>
+        <p:spPr/>
+        <p:txBody>
+          <a:bodyPr/>
+          <a:lstStyle/>
+          <a:p>
+            <a:fld id="{00F9DAA1-1DF7-43E0-8E29-0CE1148553C7}" type="slidenum">
+              <a:rPr lang="en-US" smtClean="0"/>
+              <a:pPr/>
+              <a:t>11</a:t>
+            </a:fld>
+            <a:endParaRPr lang="en-US" dirty="0"/>
+          </a:p>
+        </p:txBody>
+      </p:sp>
+      <p:sp>
+        <p:nvSpPr>
+          <p:cNvPr id="6" name="Text Placeholder 5">
+            <a:extLst>
+              <a:ext uri="{FF2B5EF4-FFF2-40B4-BE49-F238E27FC236}">
+                <a16:creationId xmlns:a16="http://schemas.microsoft.com/office/drawing/2014/main" id="{FBF024A2-ED2A-C014-D566-EECD8F5F7E41}"/>
+              </a:ext>
+            </a:extLst>
+          </p:cNvPr>
+          <p:cNvSpPr>
+            <a:spLocks noGrp="1"/>
+          </p:cNvSpPr>
+          <p:nvPr>
+            <p:ph type="body" sz="quarter" idx="10"/>
+          </p:nvPr>
+        </p:nvSpPr>
+        <p:spPr>
+          <a:xfrm>
+            <a:off x="647700" y="1043189"/>
+            <a:ext cx="7936319" cy="4900411"/>
+          </a:xfrm>
+        </p:spPr>
+        <p:txBody>
+          <a:bodyPr>
+            <a:normAutofit/>
+          </a:bodyPr>
+          <a:lstStyle/>
+          <a:p>
+            <a:r>
+              <a:rPr lang="en-US" sz="1200" dirty="0"/>
+              <a:t>Large language models are like Lucy.</a:t>
+            </a:r>
+          </a:p>
+          <a:p>
+            <a:r>
+              <a:rPr lang="en-US" sz="1200" dirty="0"/>
+              <a:t>Irrespective of the number of billions of parameters that the large language models have, these models have two forms of “memory”: parametric memory and nonparametric memory.</a:t>
+            </a:r>
+          </a:p>
+          <a:p>
+            <a:r>
+              <a:rPr lang="en-US" sz="1200" dirty="0"/>
+              <a:t>The parametric memory models have are effectively the memories encoded in the model weights during training. Their “knowledge” is only as current as the most recent data the model was trained against.</a:t>
+            </a:r>
+          </a:p>
+          <a:p>
+            <a:r>
+              <a:rPr lang="en-US" sz="1200" dirty="0"/>
+              <a:t>Comically, the solution to how we catch a model up on recent events is almost exactly like what Henry Roth did for Lucy: before the day starts show her a summary of what she needs to know for the day. This summary is passed in the context window.</a:t>
+            </a:r>
+          </a:p>
+        </p:txBody>
+      </p:sp>
+      <p:pic>
+        <p:nvPicPr>
+          <p:cNvPr id="2050" name="Picture 2">
+            <a:extLst>
+              <a:ext uri="{FF2B5EF4-FFF2-40B4-BE49-F238E27FC236}">
+                <a16:creationId xmlns:a16="http://schemas.microsoft.com/office/drawing/2014/main" id="{C503A2C3-E2AC-1FB9-A194-232E65C78710}"/>
+              </a:ext>
+            </a:extLst>
+          </p:cNvPr>
+          <p:cNvPicPr>
+            <a:picLocks noChangeAspect="1" noChangeArrowheads="1"/>
+          </p:cNvPicPr>
+          <p:nvPr/>
+        </p:nvPicPr>
+        <p:blipFill>
+          <a:blip r:embed="rId2">
+            <a:extLst>
+              <a:ext uri="{28A0092B-C50C-407E-A947-70E740481C1C}">
+                <a14:useLocalDpi xmlns:a14="http://schemas.microsoft.com/office/drawing/2010/main" val="0"/>
+              </a:ext>
+            </a:extLst>
+          </a:blip>
+          <a:srcRect/>
+          <a:stretch>
+            <a:fillRect/>
+          </a:stretch>
+        </p:blipFill>
+        <p:spPr bwMode="auto">
+          <a:xfrm>
+            <a:off x="8965171" y="1292077"/>
+            <a:ext cx="2619375" cy="3905250"/>
+          </a:xfrm>
+          <a:prstGeom prst="rect">
+            <a:avLst/>
+          </a:prstGeom>
+          <a:noFill/>
+          <a:extLst>
+            <a:ext uri="{909E8E84-426E-40DD-AFC4-6F175D3DCCD1}">
+              <a14:hiddenFill xmlns:a14="http://schemas.microsoft.com/office/drawing/2010/main">
+                <a:solidFill>
+                  <a:srgbClr val="FFFFFF"/>
+                </a:solidFill>
+              </a14:hiddenFill>
+            </a:ext>
+          </a:extLst>
+        </p:spPr>
+      </p:pic>
+      <p:pic>
+        <p:nvPicPr>
+          <p:cNvPr id="7" name="Picture 6">
+            <a:extLst>
+              <a:ext uri="{FF2B5EF4-FFF2-40B4-BE49-F238E27FC236}">
+                <a16:creationId xmlns:a16="http://schemas.microsoft.com/office/drawing/2014/main" id="{E5362208-FDB2-9D9F-F684-849BAE9598CC}"/>
+              </a:ext>
+            </a:extLst>
+          </p:cNvPr>
+          <p:cNvPicPr>
+            <a:picLocks noChangeAspect="1"/>
+          </p:cNvPicPr>
+          <p:nvPr/>
+        </p:nvPicPr>
+        <p:blipFill rotWithShape="1">
+          <a:blip r:embed="rId3"/>
+          <a:srcRect r="112"/>
+          <a:stretch/>
+        </p:blipFill>
+        <p:spPr>
+          <a:xfrm>
+            <a:off x="906231" y="3359944"/>
+            <a:ext cx="4227078" cy="3151980"/>
+          </a:xfrm>
+          <a:prstGeom prst="rect">
+            <a:avLst/>
+          </a:prstGeom>
+        </p:spPr>
+      </p:pic>
+      <p:sp>
+        <p:nvSpPr>
+          <p:cNvPr id="8" name="Arrow: Left 7">
+            <a:extLst>
+              <a:ext uri="{FF2B5EF4-FFF2-40B4-BE49-F238E27FC236}">
+                <a16:creationId xmlns:a16="http://schemas.microsoft.com/office/drawing/2014/main" id="{1951B83D-1D37-9522-ED46-7C0890D2FED8}"/>
+              </a:ext>
+            </a:extLst>
+          </p:cNvPr>
+          <p:cNvSpPr/>
+          <p:nvPr/>
+        </p:nvSpPr>
+        <p:spPr>
+          <a:xfrm rot="1800000">
+            <a:off x="5097135" y="3856961"/>
+            <a:ext cx="1049079" cy="432391"/>
+          </a:xfrm>
+          <a:prstGeom prst="leftArrow">
+            <a:avLst/>
+          </a:prstGeom>
+        </p:spPr>
+        <p:style>
+          <a:lnRef idx="2">
+            <a:schemeClr val="accent1">
+              <a:shade val="15000"/>
+            </a:schemeClr>
+          </a:lnRef>
+          <a:fillRef idx="1">
+            <a:schemeClr val="accent1"/>
+          </a:fillRef>
+          <a:effectRef idx="0">
+            <a:schemeClr val="accent1"/>
+          </a:effectRef>
+          <a:fontRef idx="minor">
+            <a:schemeClr val="lt1"/>
+          </a:fontRef>
+        </p:style>
+        <p:txBody>
+          <a:bodyPr rtlCol="0" anchor="ctr"/>
+          <a:lstStyle/>
+          <a:p>
+            <a:pPr algn="ctr"/>
+            <a:endParaRPr lang="en-US"/>
+          </a:p>
+        </p:txBody>
+      </p:sp>
+    </p:spTree>
+    <p:extLst>
+      <p:ext uri="{BB962C8B-B14F-4D97-AF65-F5344CB8AC3E}">
+        <p14:creationId xmlns:p14="http://schemas.microsoft.com/office/powerpoint/2010/main" val="657840335"/>
+      </p:ext>
+    </p:extLst>
+  </p:cSld>
+  <p:clrMapOvr>
+    <a:masterClrMapping/>
+  </p:clrMapOvr>
+</p:sld>
+</file>
+
+<file path=ppt/slides/slide12.xml><?xml version="1.0" encoding="utf-8"?>
+<p:sld xmlns:a="http://schemas.openxmlformats.org/drawingml/2006/main" xmlns:r="http://schemas.openxmlformats.org/officeDocument/2006/relationships" xmlns:p="http://schemas.openxmlformats.org/presentationml/2006/main" show="0">
+  <p:cSld>
+    <p:spTree>
+      <p:nvGrpSpPr>
+        <p:cNvPr id="1" name=""/>
+        <p:cNvGrpSpPr/>
+        <p:nvPr/>
+      </p:nvGrpSpPr>
+      <p:grpSpPr>
+        <a:xfrm>
+          <a:off x="0" y="0"/>
+          <a:ext cx="0" cy="0"/>
+          <a:chOff x="0" y="0"/>
+          <a:chExt cx="0" cy="0"/>
+        </a:xfrm>
+      </p:grpSpPr>
+      <p:sp>
+        <p:nvSpPr>
+          <p:cNvPr id="2" name="Title 1">
+            <a:extLst>
+              <a:ext uri="{FF2B5EF4-FFF2-40B4-BE49-F238E27FC236}">
+                <a16:creationId xmlns:a16="http://schemas.microsoft.com/office/drawing/2014/main" id="{1F25F260-4907-BB1B-BB78-797E7EC2255D}"/>
+              </a:ext>
+            </a:extLst>
+          </p:cNvPr>
+          <p:cNvSpPr>
+            <a:spLocks noGrp="1"/>
+          </p:cNvSpPr>
+          <p:nvPr>
+            <p:ph type="title"/>
+          </p:nvPr>
+        </p:nvSpPr>
+        <p:spPr/>
+        <p:txBody>
+          <a:bodyPr/>
+          <a:lstStyle/>
+          <a:p>
+            <a:r>
+              <a:rPr lang="en-US" dirty="0"/>
+              <a:t>When to use embeddings</a:t>
+            </a:r>
+          </a:p>
+        </p:txBody>
+      </p:sp>
+      <p:sp>
+        <p:nvSpPr>
+          <p:cNvPr id="3" name="Footer Placeholder 2">
+            <a:extLst>
+              <a:ext uri="{FF2B5EF4-FFF2-40B4-BE49-F238E27FC236}">
+                <a16:creationId xmlns:a16="http://schemas.microsoft.com/office/drawing/2014/main" id="{86503571-1B03-F615-32C1-7A80EEB0377E}"/>
+              </a:ext>
+            </a:extLst>
+          </p:cNvPr>
+          <p:cNvSpPr>
+            <a:spLocks noGrp="1"/>
+          </p:cNvSpPr>
+          <p:nvPr>
+            <p:ph type="ftr" sz="quarter" idx="3"/>
+          </p:nvPr>
+        </p:nvSpPr>
+        <p:spPr/>
+        <p:txBody>
+          <a:bodyPr/>
+          <a:lstStyle/>
+          <a:p>
+            <a:r>
+              <a:rPr lang="en-US"/>
+              <a:t>WWW.SOLLIANCE.NET</a:t>
+            </a:r>
+            <a:endParaRPr lang="en-US" dirty="0"/>
+          </a:p>
+        </p:txBody>
+      </p:sp>
+      <p:sp>
+        <p:nvSpPr>
+          <p:cNvPr id="4" name="Slide Number Placeholder 3">
+            <a:extLst>
+              <a:ext uri="{FF2B5EF4-FFF2-40B4-BE49-F238E27FC236}">
+                <a16:creationId xmlns:a16="http://schemas.microsoft.com/office/drawing/2014/main" id="{0FCD77AA-3D57-8AAE-B47C-FFF58D752430}"/>
+              </a:ext>
+            </a:extLst>
+          </p:cNvPr>
+          <p:cNvSpPr>
+            <a:spLocks noGrp="1"/>
+          </p:cNvSpPr>
+          <p:nvPr>
+            <p:ph type="sldNum" sz="quarter" idx="4"/>
+          </p:nvPr>
+        </p:nvSpPr>
+        <p:spPr/>
+        <p:txBody>
+          <a:bodyPr/>
+          <a:lstStyle/>
+          <a:p>
+            <a:fld id="{00F9DAA1-1DF7-43E0-8E29-0CE1148553C7}" type="slidenum">
+              <a:rPr lang="en-US" smtClean="0"/>
+              <a:pPr/>
+              <a:t>12</a:t>
+            </a:fld>
+            <a:endParaRPr lang="en-US" dirty="0"/>
+          </a:p>
+        </p:txBody>
+      </p:sp>
+      <p:sp>
+        <p:nvSpPr>
+          <p:cNvPr id="5" name="Text Placeholder 4">
+            <a:extLst>
+              <a:ext uri="{FF2B5EF4-FFF2-40B4-BE49-F238E27FC236}">
+                <a16:creationId xmlns:a16="http://schemas.microsoft.com/office/drawing/2014/main" id="{38194C01-5A8A-7D5C-7F21-5AD8122FDC29}"/>
+              </a:ext>
+            </a:extLst>
+          </p:cNvPr>
+          <p:cNvSpPr>
+            <a:spLocks noGrp="1"/>
+          </p:cNvSpPr>
+          <p:nvPr>
+            <p:ph type="body" sz="quarter" idx="10"/>
+          </p:nvPr>
+        </p:nvSpPr>
+        <p:spPr/>
+        <p:txBody>
+          <a:bodyPr>
+            <a:normAutofit/>
+          </a:bodyPr>
+          <a:lstStyle/>
+          <a:p>
+            <a:pPr marL="0" indent="0">
+              <a:buNone/>
+            </a:pPr>
+            <a:r>
+              <a:rPr lang="en-US" sz="1400" dirty="0"/>
+              <a:t>Embeddings basically convert text to coordinates that maintain relative distances between text that has similar meaning</a:t>
+            </a:r>
+          </a:p>
+          <a:p>
+            <a:pPr marL="0" indent="0">
+              <a:buNone/>
+            </a:pPr>
+            <a:endParaRPr lang="en-US" sz="1400" dirty="0"/>
+          </a:p>
+          <a:p>
+            <a:pPr marL="0" indent="0">
+              <a:buNone/>
+            </a:pPr>
+            <a:r>
+              <a:rPr lang="en-US" sz="1400" dirty="0"/>
+              <a:t>Applications:</a:t>
+            </a:r>
+          </a:p>
+          <a:p>
+            <a:r>
+              <a:rPr lang="en-US" sz="1400" dirty="0"/>
+              <a:t>Semantic similarity</a:t>
+            </a:r>
+          </a:p>
+          <a:p>
+            <a:r>
+              <a:rPr lang="en-US" sz="1400" dirty="0"/>
+              <a:t>Clustering</a:t>
+            </a:r>
+          </a:p>
+          <a:p>
+            <a:r>
+              <a:rPr lang="en-US" sz="1400" dirty="0"/>
+              <a:t>Full-text search</a:t>
+            </a:r>
+          </a:p>
+          <a:p>
+            <a:r>
+              <a:rPr lang="en-US" sz="1400" dirty="0"/>
+              <a:t>Classification</a:t>
+            </a:r>
+          </a:p>
+          <a:p>
+            <a:r>
+              <a:rPr lang="en-US" sz="1400" dirty="0"/>
+              <a:t>Recommendations</a:t>
+            </a:r>
+          </a:p>
+          <a:p>
+            <a:pPr marL="0" indent="0">
+              <a:buNone/>
+            </a:pPr>
+            <a:endParaRPr lang="en-US" sz="1400" dirty="0"/>
+          </a:p>
+        </p:txBody>
+      </p:sp>
+    </p:spTree>
+    <p:extLst>
+      <p:ext uri="{BB962C8B-B14F-4D97-AF65-F5344CB8AC3E}">
+        <p14:creationId xmlns:p14="http://schemas.microsoft.com/office/powerpoint/2010/main" val="3633329479"/>
+      </p:ext>
+    </p:extLst>
+  </p:cSld>
+  <p:clrMapOvr>
+    <a:masterClrMapping/>
+  </p:clrMapOvr>
+</p:sld>
+</file>
+
+<file path=ppt/slides/slide13.xml><?xml version="1.0" encoding="utf-8"?>
+<p:sld xmlns:a="http://schemas.openxmlformats.org/drawingml/2006/main" xmlns:r="http://schemas.openxmlformats.org/officeDocument/2006/relationships" xmlns:p="http://schemas.openxmlformats.org/presentationml/2006/main">
+  <p:cSld>
+    <p:spTree>
+      <p:nvGrpSpPr>
+        <p:cNvPr id="1" name=""/>
+        <p:cNvGrpSpPr/>
+        <p:nvPr/>
+      </p:nvGrpSpPr>
+      <p:grpSpPr>
+        <a:xfrm>
+          <a:off x="0" y="0"/>
+          <a:ext cx="0" cy="0"/>
+          <a:chOff x="0" y="0"/>
+          <a:chExt cx="0" cy="0"/>
+        </a:xfrm>
+      </p:grpSpPr>
+      <p:sp>
+        <p:nvSpPr>
+          <p:cNvPr id="6" name="Text Placeholder 5">
+            <a:extLst>
+              <a:ext uri="{FF2B5EF4-FFF2-40B4-BE49-F238E27FC236}">
+                <a16:creationId xmlns:a16="http://schemas.microsoft.com/office/drawing/2014/main" id="{D2D209E3-1837-4C18-AED9-45330F063EC5}"/>
+              </a:ext>
+            </a:extLst>
+          </p:cNvPr>
+          <p:cNvSpPr>
+            <a:spLocks noGrp="1"/>
+          </p:cNvSpPr>
+          <p:nvPr>
+            <p:ph type="body" sz="quarter" idx="10"/>
+          </p:nvPr>
+        </p:nvSpPr>
+        <p:spPr>
+          <a:xfrm>
+            <a:off x="3280756" y="309563"/>
+            <a:ext cx="2377094" cy="2600325"/>
+          </a:xfrm>
+        </p:spPr>
+        <p:txBody>
+          <a:bodyPr/>
+          <a:lstStyle/>
+          <a:p>
+            <a:r>
+              <a:rPr lang="en-US" dirty="0"/>
+              <a:t>2</a:t>
+            </a:r>
+          </a:p>
+        </p:txBody>
+      </p:sp>
+      <p:sp>
+        <p:nvSpPr>
+          <p:cNvPr id="2" name="Title 1">
+            <a:extLst>
+              <a:ext uri="{FF2B5EF4-FFF2-40B4-BE49-F238E27FC236}">
+                <a16:creationId xmlns:a16="http://schemas.microsoft.com/office/drawing/2014/main" id="{21A99087-F939-4EAF-AD38-211701C7799F}"/>
+              </a:ext>
+            </a:extLst>
+          </p:cNvPr>
+          <p:cNvSpPr>
+            <a:spLocks noGrp="1"/>
+          </p:cNvSpPr>
+          <p:nvPr>
+            <p:ph type="ctrTitle"/>
+          </p:nvPr>
+        </p:nvSpPr>
+        <p:spPr>
+          <a:xfrm>
+            <a:off x="1222712" y="1806388"/>
+            <a:ext cx="4581188" cy="3439389"/>
+          </a:xfrm>
+        </p:spPr>
+        <p:txBody>
+          <a:bodyPr/>
+          <a:lstStyle/>
+          <a:p>
+            <a:r>
+              <a:rPr lang="en-GB" dirty="0"/>
+              <a:t>Vector </a:t>
+            </a:r>
+            <a:br>
+              <a:rPr lang="en-GB" dirty="0"/>
+            </a:br>
+            <a:r>
+              <a:rPr lang="en-GB" dirty="0"/>
+              <a:t>Databases</a:t>
+            </a:r>
+          </a:p>
+        </p:txBody>
+      </p:sp>
+      <p:sp>
+        <p:nvSpPr>
+          <p:cNvPr id="5" name="Subtitle 4">
+            <a:extLst>
+              <a:ext uri="{FF2B5EF4-FFF2-40B4-BE49-F238E27FC236}">
+                <a16:creationId xmlns:a16="http://schemas.microsoft.com/office/drawing/2014/main" id="{9AB506EB-3DD2-4EA1-931F-DACECA2540F5}"/>
+              </a:ext>
+            </a:extLst>
+          </p:cNvPr>
+          <p:cNvSpPr>
+            <a:spLocks noGrp="1"/>
+          </p:cNvSpPr>
+          <p:nvPr>
+            <p:ph type="subTitle" idx="1"/>
+          </p:nvPr>
+        </p:nvSpPr>
+        <p:spPr/>
+        <p:txBody>
+          <a:bodyPr/>
+          <a:lstStyle/>
+          <a:p>
+            <a:endParaRPr lang="en-US"/>
+          </a:p>
+        </p:txBody>
+      </p:sp>
+    </p:spTree>
+    <p:extLst>
+      <p:ext uri="{BB962C8B-B14F-4D97-AF65-F5344CB8AC3E}">
+        <p14:creationId xmlns:p14="http://schemas.microsoft.com/office/powerpoint/2010/main" val="2118431511"/>
+      </p:ext>
+    </p:extLst>
+  </p:cSld>
+  <p:clrMapOvr>
+    <a:masterClrMapping/>
+  </p:clrMapOvr>
+</p:sld>
+</file>
+
+<file path=ppt/slides/slide14.xml><?xml version="1.0" encoding="utf-8"?>
+<p:sld xmlns:a="http://schemas.openxmlformats.org/drawingml/2006/main" xmlns:r="http://schemas.openxmlformats.org/officeDocument/2006/relationships" xmlns:p="http://schemas.openxmlformats.org/presentationml/2006/main">
+  <p:cSld>
+    <p:spTree>
+      <p:nvGrpSpPr>
+        <p:cNvPr id="1" name=""/>
+        <p:cNvGrpSpPr/>
+        <p:nvPr/>
+      </p:nvGrpSpPr>
+      <p:grpSpPr>
+        <a:xfrm>
+          <a:off x="0" y="0"/>
+          <a:ext cx="0" cy="0"/>
+          <a:chOff x="0" y="0"/>
+          <a:chExt cx="0" cy="0"/>
+        </a:xfrm>
+      </p:grpSpPr>
+      <p:sp>
+        <p:nvSpPr>
           <p:cNvPr id="11" name="Rectangle 10">
             <a:extLst>
               <a:ext uri="{FF2B5EF4-FFF2-40B4-BE49-F238E27FC236}">
@@ -21777,7 +23486,7 @@
             <a:fld id="{00F9DAA1-1DF7-43E0-8E29-0CE1148553C7}" type="slidenum">
               <a:rPr lang="en-US" smtClean="0"/>
               <a:pPr/>
-              <a:t>11</a:t>
+              <a:t>14</a:t>
             </a:fld>
             <a:endParaRPr lang="en-US" dirty="0"/>
           </a:p>
@@ -21897,7 +23606,7 @@
 </p:sld>
 </file>
 
-<file path=ppt/slides/slide12.xml><?xml version="1.0" encoding="utf-8"?>
+<file path=ppt/slides/slide15.xml><?xml version="1.0" encoding="utf-8"?>
 <p:sld xmlns:a="http://schemas.openxmlformats.org/drawingml/2006/main" xmlns:r="http://schemas.openxmlformats.org/officeDocument/2006/relationships" xmlns:p="http://schemas.openxmlformats.org/presentationml/2006/main">
   <p:cSld>
     <p:spTree>
@@ -22138,7 +23847,7 @@
                 <a:tabLst/>
                 <a:defRPr/>
               </a:pPr>
-              <a:t>12</a:t>
+              <a:t>15</a:t>
             </a:fld>
             <a:endParaRPr kumimoji="0" lang="en-US" sz="900" b="1" i="0" u="none" strike="noStrike" kern="1200" cap="none" spc="0" normalizeH="0" baseline="0" noProof="0" dirty="0">
               <a:ln>
@@ -23335,7 +25044,7 @@
 </p:sld>
 </file>
 
-<file path=ppt/slides/slide13.xml><?xml version="1.0" encoding="utf-8"?>
+<file path=ppt/slides/slide16.xml><?xml version="1.0" encoding="utf-8"?>
 <p:sld xmlns:a="http://schemas.openxmlformats.org/drawingml/2006/main" xmlns:r="http://schemas.openxmlformats.org/officeDocument/2006/relationships" xmlns:p="http://schemas.openxmlformats.org/presentationml/2006/main">
   <p:cSld>
     <p:spTree>
@@ -23539,7 +25248,7 @@
             <a:fld id="{00F9DAA1-1DF7-43E0-8E29-0CE1148553C7}" type="slidenum">
               <a:rPr lang="en-US" smtClean="0"/>
               <a:pPr/>
-              <a:t>13</a:t>
+              <a:t>16</a:t>
             </a:fld>
             <a:endParaRPr lang="en-US" dirty="0"/>
           </a:p>
@@ -24049,7 +25758,7 @@
 </p:sld>
 </file>
 
-<file path=ppt/slides/slide14.xml><?xml version="1.0" encoding="utf-8"?>
+<file path=ppt/slides/slide17.xml><?xml version="1.0" encoding="utf-8"?>
 <p:sld xmlns:a="http://schemas.openxmlformats.org/drawingml/2006/main" xmlns:r="http://schemas.openxmlformats.org/officeDocument/2006/relationships" xmlns:p="http://schemas.openxmlformats.org/presentationml/2006/main">
   <p:cSld>
     <p:spTree>
@@ -24153,7 +25862,7 @@
 </p:sld>
 </file>
 
-<file path=ppt/slides/slide15.xml><?xml version="1.0" encoding="utf-8"?>
+<file path=ppt/slides/slide18.xml><?xml version="1.0" encoding="utf-8"?>
 <p:sld xmlns:a="http://schemas.openxmlformats.org/drawingml/2006/main" xmlns:r="http://schemas.openxmlformats.org/officeDocument/2006/relationships" xmlns:p="http://schemas.openxmlformats.org/presentationml/2006/main">
   <p:cSld>
     <p:spTree>
@@ -24510,7 +26219,7 @@
 </p:sld>
 </file>
 
-<file path=ppt/slides/slide16.xml><?xml version="1.0" encoding="utf-8"?>
+<file path=ppt/slides/slide19.xml><?xml version="1.0" encoding="utf-8"?>
 <p:sld xmlns:a="http://schemas.openxmlformats.org/drawingml/2006/main" xmlns:r="http://schemas.openxmlformats.org/officeDocument/2006/relationships" xmlns:p="http://schemas.openxmlformats.org/presentationml/2006/main">
   <p:cSld>
     <p:spTree>
@@ -24748,114 +26457,6 @@
 </p:sld>
 </file>
 
-<file path=ppt/slides/slide17.xml><?xml version="1.0" encoding="utf-8"?>
-<p:sld xmlns:a="http://schemas.openxmlformats.org/drawingml/2006/main" xmlns:r="http://schemas.openxmlformats.org/officeDocument/2006/relationships" xmlns:p="http://schemas.openxmlformats.org/presentationml/2006/main">
-  <p:cSld>
-    <p:spTree>
-      <p:nvGrpSpPr>
-        <p:cNvPr id="1" name=""/>
-        <p:cNvGrpSpPr/>
-        <p:nvPr/>
-      </p:nvGrpSpPr>
-      <p:grpSpPr>
-        <a:xfrm>
-          <a:off x="0" y="0"/>
-          <a:ext cx="0" cy="0"/>
-          <a:chOff x="0" y="0"/>
-          <a:chExt cx="0" cy="0"/>
-        </a:xfrm>
-      </p:grpSpPr>
-      <p:sp>
-        <p:nvSpPr>
-          <p:cNvPr id="2" name="Title 1">
-            <a:extLst>
-              <a:ext uri="{FF2B5EF4-FFF2-40B4-BE49-F238E27FC236}">
-                <a16:creationId xmlns:a16="http://schemas.microsoft.com/office/drawing/2014/main" id="{21A99087-F939-4EAF-AD38-211701C7799F}"/>
-              </a:ext>
-            </a:extLst>
-          </p:cNvPr>
-          <p:cNvSpPr>
-            <a:spLocks noGrp="1"/>
-          </p:cNvSpPr>
-          <p:nvPr>
-            <p:ph type="ctrTitle"/>
-          </p:nvPr>
-        </p:nvSpPr>
-        <p:spPr>
-          <a:xfrm>
-            <a:off x="1014760" y="3415452"/>
-            <a:ext cx="9958039" cy="1096613"/>
-          </a:xfrm>
-        </p:spPr>
-        <p:txBody>
-          <a:bodyPr>
-            <a:noAutofit/>
-          </a:bodyPr>
-          <a:lstStyle/>
-          <a:p>
-            <a:pPr algn="l"/>
-            <a:r>
-              <a:rPr lang="en-US" sz="2800" dirty="0"/>
-              <a:t>Demos: </a:t>
-            </a:r>
-            <a:br>
-              <a:rPr lang="en-US" sz="2800" dirty="0"/>
-            </a:br>
-            <a:br>
-              <a:rPr lang="en-US" sz="2800" dirty="0"/>
-            </a:br>
-            <a:r>
-              <a:rPr lang="en-US" sz="2800" dirty="0"/>
-              <a:t>1. Vector Search with Azure Cosmos DB for NoSQL</a:t>
-            </a:r>
-            <a:br>
-              <a:rPr lang="en-US" sz="2800" dirty="0"/>
-            </a:br>
-            <a:r>
-              <a:rPr lang="en-US" sz="2800" dirty="0"/>
-              <a:t>2. Azure AI extension for Azure Database for PostgreSQL</a:t>
-            </a:r>
-          </a:p>
-        </p:txBody>
-      </p:sp>
-      <p:sp>
-        <p:nvSpPr>
-          <p:cNvPr id="5" name="Subtitle 4">
-            <a:extLst>
-              <a:ext uri="{FF2B5EF4-FFF2-40B4-BE49-F238E27FC236}">
-                <a16:creationId xmlns:a16="http://schemas.microsoft.com/office/drawing/2014/main" id="{9E5A7A43-E26E-0B3E-2551-8BCB56331F86}"/>
-              </a:ext>
-            </a:extLst>
-          </p:cNvPr>
-          <p:cNvSpPr>
-            <a:spLocks noGrp="1"/>
-          </p:cNvSpPr>
-          <p:nvPr>
-            <p:ph type="subTitle" idx="1"/>
-          </p:nvPr>
-        </p:nvSpPr>
-        <p:spPr/>
-        <p:txBody>
-          <a:bodyPr/>
-          <a:lstStyle/>
-          <a:p>
-            <a:endParaRPr lang="en-US"/>
-          </a:p>
-        </p:txBody>
-      </p:sp>
-    </p:spTree>
-    <p:extLst>
-      <p:ext uri="{BB962C8B-B14F-4D97-AF65-F5344CB8AC3E}">
-        <p14:creationId xmlns:p14="http://schemas.microsoft.com/office/powerpoint/2010/main" val="86463890"/>
-      </p:ext>
-    </p:extLst>
-  </p:cSld>
-  <p:clrMapOvr>
-    <a:masterClrMapping/>
-  </p:clrMapOvr>
-</p:sld>
-</file>
-
 <file path=ppt/slides/slide2.xml><?xml version="1.0" encoding="utf-8"?>
 <p:sld xmlns:a="http://schemas.openxmlformats.org/drawingml/2006/main" xmlns:r="http://schemas.openxmlformats.org/officeDocument/2006/relationships" xmlns:p="http://schemas.openxmlformats.org/presentationml/2006/main" show="0">
   <p:cSld>
@@ -25023,6 +26624,114 @@
     <p:extLst>
       <p:ext uri="{BB962C8B-B14F-4D97-AF65-F5344CB8AC3E}">
         <p14:creationId xmlns:p14="http://schemas.microsoft.com/office/powerpoint/2010/main" val="2612443108"/>
+      </p:ext>
+    </p:extLst>
+  </p:cSld>
+  <p:clrMapOvr>
+    <a:masterClrMapping/>
+  </p:clrMapOvr>
+</p:sld>
+</file>
+
+<file path=ppt/slides/slide20.xml><?xml version="1.0" encoding="utf-8"?>
+<p:sld xmlns:a="http://schemas.openxmlformats.org/drawingml/2006/main" xmlns:r="http://schemas.openxmlformats.org/officeDocument/2006/relationships" xmlns:p="http://schemas.openxmlformats.org/presentationml/2006/main">
+  <p:cSld>
+    <p:spTree>
+      <p:nvGrpSpPr>
+        <p:cNvPr id="1" name=""/>
+        <p:cNvGrpSpPr/>
+        <p:nvPr/>
+      </p:nvGrpSpPr>
+      <p:grpSpPr>
+        <a:xfrm>
+          <a:off x="0" y="0"/>
+          <a:ext cx="0" cy="0"/>
+          <a:chOff x="0" y="0"/>
+          <a:chExt cx="0" cy="0"/>
+        </a:xfrm>
+      </p:grpSpPr>
+      <p:sp>
+        <p:nvSpPr>
+          <p:cNvPr id="2" name="Title 1">
+            <a:extLst>
+              <a:ext uri="{FF2B5EF4-FFF2-40B4-BE49-F238E27FC236}">
+                <a16:creationId xmlns:a16="http://schemas.microsoft.com/office/drawing/2014/main" id="{21A99087-F939-4EAF-AD38-211701C7799F}"/>
+              </a:ext>
+            </a:extLst>
+          </p:cNvPr>
+          <p:cNvSpPr>
+            <a:spLocks noGrp="1"/>
+          </p:cNvSpPr>
+          <p:nvPr>
+            <p:ph type="ctrTitle"/>
+          </p:nvPr>
+        </p:nvSpPr>
+        <p:spPr>
+          <a:xfrm>
+            <a:off x="1014760" y="3415452"/>
+            <a:ext cx="9958039" cy="1096613"/>
+          </a:xfrm>
+        </p:spPr>
+        <p:txBody>
+          <a:bodyPr>
+            <a:noAutofit/>
+          </a:bodyPr>
+          <a:lstStyle/>
+          <a:p>
+            <a:pPr algn="l"/>
+            <a:r>
+              <a:rPr lang="en-US" sz="2800" dirty="0"/>
+              <a:t>Demos: </a:t>
+            </a:r>
+            <a:br>
+              <a:rPr lang="en-US" sz="2800" dirty="0"/>
+            </a:br>
+            <a:br>
+              <a:rPr lang="en-US" sz="2800" dirty="0"/>
+            </a:br>
+            <a:r>
+              <a:rPr lang="en-US" sz="2800" dirty="0"/>
+              <a:t>1. Vector Search with Azure Cosmos DB for NoSQL</a:t>
+            </a:r>
+            <a:br>
+              <a:rPr lang="en-US" sz="2800" dirty="0"/>
+            </a:br>
+            <a:r>
+              <a:rPr lang="en-US" sz="2800" dirty="0"/>
+              <a:t>2. Azure AI extension for Azure Database for PostgreSQL</a:t>
+            </a:r>
+          </a:p>
+        </p:txBody>
+      </p:sp>
+      <p:sp>
+        <p:nvSpPr>
+          <p:cNvPr id="5" name="Subtitle 4">
+            <a:extLst>
+              <a:ext uri="{FF2B5EF4-FFF2-40B4-BE49-F238E27FC236}">
+                <a16:creationId xmlns:a16="http://schemas.microsoft.com/office/drawing/2014/main" id="{9E5A7A43-E26E-0B3E-2551-8BCB56331F86}"/>
+              </a:ext>
+            </a:extLst>
+          </p:cNvPr>
+          <p:cNvSpPr>
+            <a:spLocks noGrp="1"/>
+          </p:cNvSpPr>
+          <p:nvPr>
+            <p:ph type="subTitle" idx="1"/>
+          </p:nvPr>
+        </p:nvSpPr>
+        <p:spPr/>
+        <p:txBody>
+          <a:bodyPr/>
+          <a:lstStyle/>
+          <a:p>
+            <a:endParaRPr lang="en-US"/>
+          </a:p>
+        </p:txBody>
+      </p:sp>
+    </p:spTree>
+    <p:extLst>
+      <p:ext uri="{BB962C8B-B14F-4D97-AF65-F5344CB8AC3E}">
+        <p14:creationId xmlns:p14="http://schemas.microsoft.com/office/powerpoint/2010/main" val="86463890"/>
       </p:ext>
     </p:extLst>
   </p:cSld>
@@ -28827,7 +30536,7 @@
 </file>
 
 <file path=ppt/slides/slide9.xml><?xml version="1.0" encoding="utf-8"?>
-<p:sld xmlns:a="http://schemas.openxmlformats.org/drawingml/2006/main" xmlns:r="http://schemas.openxmlformats.org/officeDocument/2006/relationships" xmlns:p="http://schemas.openxmlformats.org/presentationml/2006/main" show="0">
+<p:sld xmlns:a="http://schemas.openxmlformats.org/drawingml/2006/main" xmlns:r="http://schemas.openxmlformats.org/officeDocument/2006/relationships" xmlns:p="http://schemas.openxmlformats.org/presentationml/2006/main">
   <p:cSld>
     <p:spTree>
       <p:nvGrpSpPr>
@@ -28848,7 +30557,7 @@
           <p:cNvPr id="2" name="Title 1">
             <a:extLst>
               <a:ext uri="{FF2B5EF4-FFF2-40B4-BE49-F238E27FC236}">
-                <a16:creationId xmlns:a16="http://schemas.microsoft.com/office/drawing/2014/main" id="{1F25F260-4907-BB1B-BB78-797E7EC2255D}"/>
+                <a16:creationId xmlns:a16="http://schemas.microsoft.com/office/drawing/2014/main" id="{F5450C3D-423F-F497-A760-82845EE2ACA7}"/>
               </a:ext>
             </a:extLst>
           </p:cNvPr>
@@ -28866,7 +30575,7 @@
           <a:p>
             <a:r>
               <a:rPr lang="en-US" dirty="0"/>
-              <a:t>When to use embeddings</a:t>
+              <a:t>RAG pattern </a:t>
             </a:r>
           </a:p>
         </p:txBody>
@@ -28876,7 +30585,7 @@
           <p:cNvPr id="3" name="Footer Placeholder 2">
             <a:extLst>
               <a:ext uri="{FF2B5EF4-FFF2-40B4-BE49-F238E27FC236}">
-                <a16:creationId xmlns:a16="http://schemas.microsoft.com/office/drawing/2014/main" id="{86503571-1B03-F615-32C1-7A80EEB0377E}"/>
+                <a16:creationId xmlns:a16="http://schemas.microsoft.com/office/drawing/2014/main" id="{38211687-3D91-BACF-9441-0FB047361A6F}"/>
               </a:ext>
             </a:extLst>
           </p:cNvPr>
@@ -28905,7 +30614,7 @@
           <p:cNvPr id="4" name="Slide Number Placeholder 3">
             <a:extLst>
               <a:ext uri="{FF2B5EF4-FFF2-40B4-BE49-F238E27FC236}">
-                <a16:creationId xmlns:a16="http://schemas.microsoft.com/office/drawing/2014/main" id="{0FCD77AA-3D57-8AAE-B47C-FFF58D752430}"/>
+                <a16:creationId xmlns:a16="http://schemas.microsoft.com/office/drawing/2014/main" id="{3CB9B8FA-0BBF-B38E-B44D-39E9EA647C08}"/>
               </a:ext>
             </a:extLst>
           </p:cNvPr>
@@ -28935,7 +30644,7 @@
           <p:cNvPr id="5" name="Text Placeholder 4">
             <a:extLst>
               <a:ext uri="{FF2B5EF4-FFF2-40B4-BE49-F238E27FC236}">
-                <a16:creationId xmlns:a16="http://schemas.microsoft.com/office/drawing/2014/main" id="{38194C01-5A8A-7D5C-7F21-5AD8122FDC29}"/>
+                <a16:creationId xmlns:a16="http://schemas.microsoft.com/office/drawing/2014/main" id="{341BF0B6-4911-3959-32D2-0D38CDDD2288}"/>
               </a:ext>
             </a:extLst>
           </p:cNvPr>
@@ -28946,10 +30655,15 @@
             <p:ph type="body" sz="quarter" idx="10"/>
           </p:nvPr>
         </p:nvSpPr>
-        <p:spPr/>
+        <p:spPr>
+          <a:xfrm>
+            <a:off x="647699" y="901296"/>
+            <a:ext cx="10932083" cy="802758"/>
+          </a:xfrm>
+        </p:spPr>
         <p:txBody>
           <a:bodyPr>
-            <a:normAutofit/>
+            <a:noAutofit/>
           </a:bodyPr>
           <a:lstStyle/>
           <a:p>
@@ -28957,67 +30671,1106 @@
               <a:buNone/>
             </a:pPr>
             <a:r>
+              <a:rPr lang="en-US" sz="1200" dirty="0"/>
+              <a:t>The typical Retrieval Augmented Generation (RAG) pattern differs from the original RAG in replacing fine tuned encoders for vectorization with an OpenAI GPT embedding endpoint, and the fine-tuned completions model with an OpenAI GPT completions endpoint, and the retriever relies on service providing an index and another providing the documents and orchestration of the processes.</a:t>
+            </a:r>
+          </a:p>
+        </p:txBody>
+      </p:sp>
+      <p:pic>
+        <p:nvPicPr>
+          <p:cNvPr id="7" name="Graphic 6" descr="Search Inventory with solid fill">
+            <a:extLst>
+              <a:ext uri="{FF2B5EF4-FFF2-40B4-BE49-F238E27FC236}">
+                <a16:creationId xmlns:a16="http://schemas.microsoft.com/office/drawing/2014/main" id="{4E8EFA14-939A-21D1-D286-E23301F94680}"/>
+              </a:ext>
+            </a:extLst>
+          </p:cNvPr>
+          <p:cNvPicPr>
+            <a:picLocks noChangeAspect="1"/>
+          </p:cNvPicPr>
+          <p:nvPr/>
+        </p:nvPicPr>
+        <p:blipFill>
+          <a:blip r:embed="rId3">
+            <a:extLst>
+              <a:ext uri="{28A0092B-C50C-407E-A947-70E740481C1C}">
+                <a14:useLocalDpi xmlns:a14="http://schemas.microsoft.com/office/drawing/2010/main" val="0"/>
+              </a:ext>
+              <a:ext uri="{96DAC541-7B7A-43D3-8B79-37D633B846F1}">
+                <asvg:svgBlip xmlns:asvg="http://schemas.microsoft.com/office/drawing/2016/SVG/main" r:embed="rId4"/>
+              </a:ext>
+            </a:extLst>
+          </a:blip>
+          <a:stretch>
+            <a:fillRect/>
+          </a:stretch>
+        </p:blipFill>
+        <p:spPr>
+          <a:xfrm>
+            <a:off x="5539437" y="3457505"/>
+            <a:ext cx="914400" cy="914400"/>
+          </a:xfrm>
+          <a:prstGeom prst="rect">
+            <a:avLst/>
+          </a:prstGeom>
+        </p:spPr>
+      </p:pic>
+      <p:pic>
+        <p:nvPicPr>
+          <p:cNvPr id="13" name="Graphic 12">
+            <a:extLst>
+              <a:ext uri="{FF2B5EF4-FFF2-40B4-BE49-F238E27FC236}">
+                <a16:creationId xmlns:a16="http://schemas.microsoft.com/office/drawing/2014/main" id="{F7E9E1C1-5481-183E-8F1E-4747509BF0D7}"/>
+              </a:ext>
+            </a:extLst>
+          </p:cNvPr>
+          <p:cNvPicPr>
+            <a:picLocks noChangeAspect="1"/>
+          </p:cNvPicPr>
+          <p:nvPr/>
+        </p:nvPicPr>
+        <p:blipFill>
+          <a:blip r:embed="rId5">
+            <a:extLst>
+              <a:ext uri="{28A0092B-C50C-407E-A947-70E740481C1C}">
+                <a14:useLocalDpi xmlns:a14="http://schemas.microsoft.com/office/drawing/2010/main" val="0"/>
+              </a:ext>
+            </a:extLst>
+          </a:blip>
+          <a:srcRect/>
+          <a:stretch/>
+        </p:blipFill>
+        <p:spPr>
+          <a:xfrm>
+            <a:off x="7627575" y="3569148"/>
+            <a:ext cx="732077" cy="744279"/>
+          </a:xfrm>
+          <a:prstGeom prst="rect">
+            <a:avLst/>
+          </a:prstGeom>
+        </p:spPr>
+      </p:pic>
+      <p:cxnSp>
+        <p:nvCxnSpPr>
+          <p:cNvPr id="15" name="Straight Arrow Connector 14">
+            <a:extLst>
+              <a:ext uri="{FF2B5EF4-FFF2-40B4-BE49-F238E27FC236}">
+                <a16:creationId xmlns:a16="http://schemas.microsoft.com/office/drawing/2014/main" id="{688A8FE0-F40A-B850-DABF-C8499FEB9975}"/>
+              </a:ext>
+            </a:extLst>
+          </p:cNvPr>
+          <p:cNvCxnSpPr>
+            <a:cxnSpLocks/>
+          </p:cNvCxnSpPr>
+          <p:nvPr/>
+        </p:nvCxnSpPr>
+        <p:spPr>
+          <a:xfrm>
+            <a:off x="6492822" y="3941288"/>
+            <a:ext cx="988828" cy="0"/>
+          </a:xfrm>
+          <a:prstGeom prst="straightConnector1">
+            <a:avLst/>
+          </a:prstGeom>
+          <a:ln w="38100">
+            <a:solidFill>
+              <a:schemeClr val="tx1"/>
+            </a:solidFill>
+            <a:tailEnd type="triangle"/>
+          </a:ln>
+        </p:spPr>
+        <p:style>
+          <a:lnRef idx="1">
+            <a:schemeClr val="accent1"/>
+          </a:lnRef>
+          <a:fillRef idx="0">
+            <a:schemeClr val="accent1"/>
+          </a:fillRef>
+          <a:effectRef idx="0">
+            <a:schemeClr val="accent1"/>
+          </a:effectRef>
+          <a:fontRef idx="minor">
+            <a:schemeClr val="tx1"/>
+          </a:fontRef>
+        </p:style>
+      </p:cxnSp>
+      <p:sp>
+        <p:nvSpPr>
+          <p:cNvPr id="18" name="TextBox 17">
+            <a:extLst>
+              <a:ext uri="{FF2B5EF4-FFF2-40B4-BE49-F238E27FC236}">
+                <a16:creationId xmlns:a16="http://schemas.microsoft.com/office/drawing/2014/main" id="{31679EDF-07D3-23DB-57F4-FBDAA0231122}"/>
+              </a:ext>
+            </a:extLst>
+          </p:cNvPr>
+          <p:cNvSpPr txBox="1"/>
+          <p:nvPr/>
+        </p:nvSpPr>
+        <p:spPr>
+          <a:xfrm>
+            <a:off x="5494126" y="4371905"/>
+            <a:ext cx="1026243" cy="307777"/>
+          </a:xfrm>
+          <a:prstGeom prst="rect">
+            <a:avLst/>
+          </a:prstGeom>
+          <a:noFill/>
+        </p:spPr>
+        <p:txBody>
+          <a:bodyPr wrap="none" rtlCol="0">
+            <a:spAutoFit/>
+          </a:bodyPr>
+          <a:lstStyle/>
+          <a:p>
+            <a:r>
+              <a:rPr lang="en-US" sz="1400" b="1" dirty="0"/>
+              <a:t>Retrieval</a:t>
+            </a:r>
+          </a:p>
+        </p:txBody>
+      </p:sp>
+      <p:sp>
+        <p:nvSpPr>
+          <p:cNvPr id="19" name="TextBox 18">
+            <a:extLst>
+              <a:ext uri="{FF2B5EF4-FFF2-40B4-BE49-F238E27FC236}">
+                <a16:creationId xmlns:a16="http://schemas.microsoft.com/office/drawing/2014/main" id="{DE320AFC-C61D-FD11-89D6-3A8D2DAD9E33}"/>
+              </a:ext>
+            </a:extLst>
+          </p:cNvPr>
+          <p:cNvSpPr txBox="1"/>
+          <p:nvPr/>
+        </p:nvSpPr>
+        <p:spPr>
+          <a:xfrm>
+            <a:off x="7386906" y="4371905"/>
+            <a:ext cx="1234633" cy="307777"/>
+          </a:xfrm>
+          <a:prstGeom prst="rect">
+            <a:avLst/>
+          </a:prstGeom>
+          <a:noFill/>
+        </p:spPr>
+        <p:txBody>
+          <a:bodyPr wrap="none" rtlCol="0">
+            <a:spAutoFit/>
+          </a:bodyPr>
+          <a:lstStyle/>
+          <a:p>
+            <a:r>
+              <a:rPr lang="en-US" sz="1400" b="1" dirty="0"/>
+              <a:t>Generation</a:t>
+            </a:r>
+          </a:p>
+        </p:txBody>
+      </p:sp>
+      <p:sp>
+        <p:nvSpPr>
+          <p:cNvPr id="20" name="TextBox 19">
+            <a:extLst>
+              <a:ext uri="{FF2B5EF4-FFF2-40B4-BE49-F238E27FC236}">
+                <a16:creationId xmlns:a16="http://schemas.microsoft.com/office/drawing/2014/main" id="{B8814B45-68AF-FA94-B6D1-9F58807A3940}"/>
+              </a:ext>
+            </a:extLst>
+          </p:cNvPr>
+          <p:cNvSpPr txBox="1"/>
+          <p:nvPr/>
+        </p:nvSpPr>
+        <p:spPr>
+          <a:xfrm>
+            <a:off x="647700" y="2132647"/>
+            <a:ext cx="3185340" cy="954107"/>
+          </a:xfrm>
+          <a:prstGeom prst="rect">
+            <a:avLst/>
+          </a:prstGeom>
+          <a:noFill/>
+        </p:spPr>
+        <p:txBody>
+          <a:bodyPr wrap="square" rtlCol="0">
+            <a:spAutoFit/>
+          </a:bodyPr>
+          <a:lstStyle/>
+          <a:p>
+            <a:pPr marL="285750" indent="-285750">
+              <a:buFont typeface="Arial" panose="020B0604020202020204" pitchFamily="34" charset="0"/>
+              <a:buChar char="•"/>
+            </a:pPr>
+            <a:r>
               <a:rPr lang="en-US" sz="1400" dirty="0"/>
-              <a:t>Embeddings basically convert text to coordinates that maintain relative distances between text that has similar meaning</a:t>
-            </a:r>
-          </a:p>
+              <a:t>The retrieval phase searches relevant documents or data. </a:t>
+            </a:r>
+          </a:p>
+          <a:p>
+            <a:pPr marL="285750" indent="-285750">
+              <a:buFont typeface="Arial" panose="020B0604020202020204" pitchFamily="34" charset="0"/>
+              <a:buChar char="•"/>
+            </a:pPr>
+            <a:r>
+              <a:rPr lang="en-US" sz="1400" dirty="0"/>
+              <a:t>It uses this context to generate informed responses.</a:t>
+            </a:r>
+          </a:p>
+        </p:txBody>
+      </p:sp>
+      <p:sp>
+        <p:nvSpPr>
+          <p:cNvPr id="21" name="Text Placeholder 4">
+            <a:extLst>
+              <a:ext uri="{FF2B5EF4-FFF2-40B4-BE49-F238E27FC236}">
+                <a16:creationId xmlns:a16="http://schemas.microsoft.com/office/drawing/2014/main" id="{BE0257B8-3B9E-E1B3-C525-FA37F2845AC2}"/>
+              </a:ext>
+            </a:extLst>
+          </p:cNvPr>
+          <p:cNvSpPr txBox="1">
+            <a:spLocks/>
+          </p:cNvSpPr>
+          <p:nvPr/>
+        </p:nvSpPr>
+        <p:spPr>
+          <a:xfrm>
+            <a:off x="812506" y="3457217"/>
+            <a:ext cx="3020534" cy="1061719"/>
+          </a:xfrm>
+          <a:prstGeom prst="rect">
+            <a:avLst/>
+          </a:prstGeom>
+          <a:solidFill>
+            <a:schemeClr val="accent2">
+              <a:lumMod val="40000"/>
+              <a:lumOff val="60000"/>
+            </a:schemeClr>
+          </a:solidFill>
+        </p:spPr>
+        <p:txBody>
+          <a:bodyPr vert="horz" lIns="91440" tIns="45720" rIns="91440" bIns="45720" rtlCol="0">
+            <a:normAutofit fontScale="85000" lnSpcReduction="20000"/>
+          </a:bodyPr>
+          <a:lstStyle>
+            <a:lvl1pPr marL="228600" indent="-228600" algn="l" defTabSz="914400" rtl="0" eaLnBrk="1" latinLnBrk="0" hangingPunct="1">
+              <a:lnSpc>
+                <a:spcPct val="120000"/>
+              </a:lnSpc>
+              <a:spcBef>
+                <a:spcPts val="600"/>
+              </a:spcBef>
+              <a:buFont typeface="Arial" panose="020B0604020202020204" pitchFamily="34" charset="0"/>
+              <a:buChar char="•"/>
+              <a:defRPr sz="1400" kern="1200">
+                <a:solidFill>
+                  <a:schemeClr val="tx1"/>
+                </a:solidFill>
+                <a:latin typeface="+mn-lt"/>
+                <a:ea typeface="+mn-ea"/>
+                <a:cs typeface="+mn-cs"/>
+              </a:defRPr>
+            </a:lvl1pPr>
+            <a:lvl2pPr marL="685800" indent="-228600" algn="l" defTabSz="914400" rtl="0" eaLnBrk="1" latinLnBrk="0" hangingPunct="1">
+              <a:lnSpc>
+                <a:spcPct val="120000"/>
+              </a:lnSpc>
+              <a:spcBef>
+                <a:spcPts val="600"/>
+              </a:spcBef>
+              <a:buFont typeface="Arial" panose="020B0604020202020204" pitchFamily="34" charset="0"/>
+              <a:buChar char="•"/>
+              <a:defRPr sz="1200" kern="1200">
+                <a:solidFill>
+                  <a:schemeClr val="tx1"/>
+                </a:solidFill>
+                <a:latin typeface="+mn-lt"/>
+                <a:ea typeface="+mn-ea"/>
+                <a:cs typeface="+mn-cs"/>
+              </a:defRPr>
+            </a:lvl2pPr>
+            <a:lvl3pPr marL="1143000" indent="-228600" algn="l" defTabSz="914400" rtl="0" eaLnBrk="1" latinLnBrk="0" hangingPunct="1">
+              <a:lnSpc>
+                <a:spcPct val="120000"/>
+              </a:lnSpc>
+              <a:spcBef>
+                <a:spcPts val="600"/>
+              </a:spcBef>
+              <a:buFont typeface="Arial" panose="020B0604020202020204" pitchFamily="34" charset="0"/>
+              <a:buChar char="•"/>
+              <a:defRPr sz="1100" kern="1200">
+                <a:solidFill>
+                  <a:schemeClr val="tx1"/>
+                </a:solidFill>
+                <a:latin typeface="+mn-lt"/>
+                <a:ea typeface="+mn-ea"/>
+                <a:cs typeface="+mn-cs"/>
+              </a:defRPr>
+            </a:lvl3pPr>
+            <a:lvl4pPr marL="1600200" indent="-228600" algn="l" defTabSz="914400" rtl="0" eaLnBrk="1" latinLnBrk="0" hangingPunct="1">
+              <a:lnSpc>
+                <a:spcPct val="120000"/>
+              </a:lnSpc>
+              <a:spcBef>
+                <a:spcPts val="600"/>
+              </a:spcBef>
+              <a:buFont typeface="Arial" panose="020B0604020202020204" pitchFamily="34" charset="0"/>
+              <a:buChar char="•"/>
+              <a:defRPr sz="1050" kern="1200">
+                <a:solidFill>
+                  <a:schemeClr val="tx1"/>
+                </a:solidFill>
+                <a:latin typeface="+mn-lt"/>
+                <a:ea typeface="+mn-ea"/>
+                <a:cs typeface="+mn-cs"/>
+              </a:defRPr>
+            </a:lvl4pPr>
+            <a:lvl5pPr marL="2057400" indent="-228600" algn="l" defTabSz="914400" rtl="0" eaLnBrk="1" latinLnBrk="0" hangingPunct="1">
+              <a:lnSpc>
+                <a:spcPct val="120000"/>
+              </a:lnSpc>
+              <a:spcBef>
+                <a:spcPts val="600"/>
+              </a:spcBef>
+              <a:buFont typeface="Arial" panose="020B0604020202020204" pitchFamily="34" charset="0"/>
+              <a:buChar char="•"/>
+              <a:defRPr sz="1050" kern="1200">
+                <a:solidFill>
+                  <a:schemeClr val="tx1"/>
+                </a:solidFill>
+                <a:latin typeface="+mn-lt"/>
+                <a:ea typeface="+mn-ea"/>
+                <a:cs typeface="+mn-cs"/>
+              </a:defRPr>
+            </a:lvl5pPr>
+            <a:lvl6pPr marL="2514600" indent="-228600" algn="l" defTabSz="914400" rtl="0" eaLnBrk="1" latinLnBrk="0" hangingPunct="1">
+              <a:lnSpc>
+                <a:spcPct val="90000"/>
+              </a:lnSpc>
+              <a:spcBef>
+                <a:spcPts val="500"/>
+              </a:spcBef>
+              <a:buFont typeface="Arial" panose="020B0604020202020204" pitchFamily="34" charset="0"/>
+              <a:buChar char="•"/>
+              <a:defRPr sz="1800" kern="1200">
+                <a:solidFill>
+                  <a:schemeClr val="tx1"/>
+                </a:solidFill>
+                <a:latin typeface="+mn-lt"/>
+                <a:ea typeface="+mn-ea"/>
+                <a:cs typeface="+mn-cs"/>
+              </a:defRPr>
+            </a:lvl6pPr>
+            <a:lvl7pPr marL="2971800" indent="-228600" algn="l" defTabSz="914400" rtl="0" eaLnBrk="1" latinLnBrk="0" hangingPunct="1">
+              <a:lnSpc>
+                <a:spcPct val="90000"/>
+              </a:lnSpc>
+              <a:spcBef>
+                <a:spcPts val="500"/>
+              </a:spcBef>
+              <a:buFont typeface="Arial" panose="020B0604020202020204" pitchFamily="34" charset="0"/>
+              <a:buChar char="•"/>
+              <a:defRPr sz="1800" kern="1200">
+                <a:solidFill>
+                  <a:schemeClr val="tx1"/>
+                </a:solidFill>
+                <a:latin typeface="+mn-lt"/>
+                <a:ea typeface="+mn-ea"/>
+                <a:cs typeface="+mn-cs"/>
+              </a:defRPr>
+            </a:lvl7pPr>
+            <a:lvl8pPr marL="3429000" indent="-228600" algn="l" defTabSz="914400" rtl="0" eaLnBrk="1" latinLnBrk="0" hangingPunct="1">
+              <a:lnSpc>
+                <a:spcPct val="90000"/>
+              </a:lnSpc>
+              <a:spcBef>
+                <a:spcPts val="500"/>
+              </a:spcBef>
+              <a:buFont typeface="Arial" panose="020B0604020202020204" pitchFamily="34" charset="0"/>
+              <a:buChar char="•"/>
+              <a:defRPr sz="1800" kern="1200">
+                <a:solidFill>
+                  <a:schemeClr val="tx1"/>
+                </a:solidFill>
+                <a:latin typeface="+mn-lt"/>
+                <a:ea typeface="+mn-ea"/>
+                <a:cs typeface="+mn-cs"/>
+              </a:defRPr>
+            </a:lvl8pPr>
+            <a:lvl9pPr marL="3886200" indent="-228600" algn="l" defTabSz="914400" rtl="0" eaLnBrk="1" latinLnBrk="0" hangingPunct="1">
+              <a:lnSpc>
+                <a:spcPct val="90000"/>
+              </a:lnSpc>
+              <a:spcBef>
+                <a:spcPts val="500"/>
+              </a:spcBef>
+              <a:buFont typeface="Arial" panose="020B0604020202020204" pitchFamily="34" charset="0"/>
+              <a:buChar char="•"/>
+              <a:defRPr sz="1800" kern="1200">
+                <a:solidFill>
+                  <a:schemeClr val="tx1"/>
+                </a:solidFill>
+                <a:latin typeface="+mn-lt"/>
+                <a:ea typeface="+mn-ea"/>
+                <a:cs typeface="+mn-cs"/>
+              </a:defRPr>
+            </a:lvl9pPr>
+          </a:lstStyle>
           <a:p>
             <a:pPr marL="0" indent="0">
+              <a:buFont typeface="Arial" panose="020B0604020202020204" pitchFamily="34" charset="0"/>
               <a:buNone/>
             </a:pPr>
-            <a:endParaRPr lang="en-US" sz="1400" dirty="0"/>
-          </a:p>
+            <a:r>
+              <a:rPr lang="en-US" b="1" dirty="0"/>
+              <a:t>Benefits of RAG</a:t>
+            </a:r>
+          </a:p>
+          <a:p>
+            <a:r>
+              <a:rPr lang="en-US" dirty="0"/>
+              <a:t>Enhanced Accuracy</a:t>
+            </a:r>
+          </a:p>
+          <a:p>
+            <a:r>
+              <a:rPr lang="en-US" dirty="0"/>
+              <a:t>Contextual Relevance</a:t>
+            </a:r>
+          </a:p>
+          <a:p>
+            <a:r>
+              <a:rPr lang="en-US" dirty="0"/>
+              <a:t>Scalability</a:t>
+            </a:r>
+          </a:p>
+        </p:txBody>
+      </p:sp>
+      <p:sp>
+        <p:nvSpPr>
+          <p:cNvPr id="22" name="Text Placeholder 4">
+            <a:extLst>
+              <a:ext uri="{FF2B5EF4-FFF2-40B4-BE49-F238E27FC236}">
+                <a16:creationId xmlns:a16="http://schemas.microsoft.com/office/drawing/2014/main" id="{C3929C12-D1D4-422D-C9E0-C5E4215E0DC4}"/>
+              </a:ext>
+            </a:extLst>
+          </p:cNvPr>
+          <p:cNvSpPr txBox="1">
+            <a:spLocks/>
+          </p:cNvSpPr>
+          <p:nvPr/>
+        </p:nvSpPr>
+        <p:spPr>
+          <a:xfrm>
+            <a:off x="4058979" y="4919594"/>
+            <a:ext cx="7860120" cy="983512"/>
+          </a:xfrm>
+          <a:prstGeom prst="rect">
+            <a:avLst/>
+          </a:prstGeom>
+        </p:spPr>
+        <p:txBody>
+          <a:bodyPr vert="horz" lIns="91440" tIns="45720" rIns="91440" bIns="45720" rtlCol="0">
+            <a:normAutofit/>
+          </a:bodyPr>
+          <a:lstStyle>
+            <a:lvl1pPr marL="228600" indent="-228600" algn="l" defTabSz="914400" rtl="0" eaLnBrk="1" latinLnBrk="0" hangingPunct="1">
+              <a:lnSpc>
+                <a:spcPct val="120000"/>
+              </a:lnSpc>
+              <a:spcBef>
+                <a:spcPts val="600"/>
+              </a:spcBef>
+              <a:buFont typeface="Arial" panose="020B0604020202020204" pitchFamily="34" charset="0"/>
+              <a:buChar char="•"/>
+              <a:defRPr sz="1400" kern="1200">
+                <a:solidFill>
+                  <a:schemeClr val="tx1"/>
+                </a:solidFill>
+                <a:latin typeface="+mn-lt"/>
+                <a:ea typeface="+mn-ea"/>
+                <a:cs typeface="+mn-cs"/>
+              </a:defRPr>
+            </a:lvl1pPr>
+            <a:lvl2pPr marL="685800" indent="-228600" algn="l" defTabSz="914400" rtl="0" eaLnBrk="1" latinLnBrk="0" hangingPunct="1">
+              <a:lnSpc>
+                <a:spcPct val="120000"/>
+              </a:lnSpc>
+              <a:spcBef>
+                <a:spcPts val="600"/>
+              </a:spcBef>
+              <a:buFont typeface="Arial" panose="020B0604020202020204" pitchFamily="34" charset="0"/>
+              <a:buChar char="•"/>
+              <a:defRPr sz="1200" kern="1200">
+                <a:solidFill>
+                  <a:schemeClr val="tx1"/>
+                </a:solidFill>
+                <a:latin typeface="+mn-lt"/>
+                <a:ea typeface="+mn-ea"/>
+                <a:cs typeface="+mn-cs"/>
+              </a:defRPr>
+            </a:lvl2pPr>
+            <a:lvl3pPr marL="1143000" indent="-228600" algn="l" defTabSz="914400" rtl="0" eaLnBrk="1" latinLnBrk="0" hangingPunct="1">
+              <a:lnSpc>
+                <a:spcPct val="120000"/>
+              </a:lnSpc>
+              <a:spcBef>
+                <a:spcPts val="600"/>
+              </a:spcBef>
+              <a:buFont typeface="Arial" panose="020B0604020202020204" pitchFamily="34" charset="0"/>
+              <a:buChar char="•"/>
+              <a:defRPr sz="1100" kern="1200">
+                <a:solidFill>
+                  <a:schemeClr val="tx1"/>
+                </a:solidFill>
+                <a:latin typeface="+mn-lt"/>
+                <a:ea typeface="+mn-ea"/>
+                <a:cs typeface="+mn-cs"/>
+              </a:defRPr>
+            </a:lvl3pPr>
+            <a:lvl4pPr marL="1600200" indent="-228600" algn="l" defTabSz="914400" rtl="0" eaLnBrk="1" latinLnBrk="0" hangingPunct="1">
+              <a:lnSpc>
+                <a:spcPct val="120000"/>
+              </a:lnSpc>
+              <a:spcBef>
+                <a:spcPts val="600"/>
+              </a:spcBef>
+              <a:buFont typeface="Arial" panose="020B0604020202020204" pitchFamily="34" charset="0"/>
+              <a:buChar char="•"/>
+              <a:defRPr sz="1050" kern="1200">
+                <a:solidFill>
+                  <a:schemeClr val="tx1"/>
+                </a:solidFill>
+                <a:latin typeface="+mn-lt"/>
+                <a:ea typeface="+mn-ea"/>
+                <a:cs typeface="+mn-cs"/>
+              </a:defRPr>
+            </a:lvl4pPr>
+            <a:lvl5pPr marL="2057400" indent="-228600" algn="l" defTabSz="914400" rtl="0" eaLnBrk="1" latinLnBrk="0" hangingPunct="1">
+              <a:lnSpc>
+                <a:spcPct val="120000"/>
+              </a:lnSpc>
+              <a:spcBef>
+                <a:spcPts val="600"/>
+              </a:spcBef>
+              <a:buFont typeface="Arial" panose="020B0604020202020204" pitchFamily="34" charset="0"/>
+              <a:buChar char="•"/>
+              <a:defRPr sz="1050" kern="1200">
+                <a:solidFill>
+                  <a:schemeClr val="tx1"/>
+                </a:solidFill>
+                <a:latin typeface="+mn-lt"/>
+                <a:ea typeface="+mn-ea"/>
+                <a:cs typeface="+mn-cs"/>
+              </a:defRPr>
+            </a:lvl5pPr>
+            <a:lvl6pPr marL="2514600" indent="-228600" algn="l" defTabSz="914400" rtl="0" eaLnBrk="1" latinLnBrk="0" hangingPunct="1">
+              <a:lnSpc>
+                <a:spcPct val="90000"/>
+              </a:lnSpc>
+              <a:spcBef>
+                <a:spcPts val="500"/>
+              </a:spcBef>
+              <a:buFont typeface="Arial" panose="020B0604020202020204" pitchFamily="34" charset="0"/>
+              <a:buChar char="•"/>
+              <a:defRPr sz="1800" kern="1200">
+                <a:solidFill>
+                  <a:schemeClr val="tx1"/>
+                </a:solidFill>
+                <a:latin typeface="+mn-lt"/>
+                <a:ea typeface="+mn-ea"/>
+                <a:cs typeface="+mn-cs"/>
+              </a:defRPr>
+            </a:lvl6pPr>
+            <a:lvl7pPr marL="2971800" indent="-228600" algn="l" defTabSz="914400" rtl="0" eaLnBrk="1" latinLnBrk="0" hangingPunct="1">
+              <a:lnSpc>
+                <a:spcPct val="90000"/>
+              </a:lnSpc>
+              <a:spcBef>
+                <a:spcPts val="500"/>
+              </a:spcBef>
+              <a:buFont typeface="Arial" panose="020B0604020202020204" pitchFamily="34" charset="0"/>
+              <a:buChar char="•"/>
+              <a:defRPr sz="1800" kern="1200">
+                <a:solidFill>
+                  <a:schemeClr val="tx1"/>
+                </a:solidFill>
+                <a:latin typeface="+mn-lt"/>
+                <a:ea typeface="+mn-ea"/>
+                <a:cs typeface="+mn-cs"/>
+              </a:defRPr>
+            </a:lvl7pPr>
+            <a:lvl8pPr marL="3429000" indent="-228600" algn="l" defTabSz="914400" rtl="0" eaLnBrk="1" latinLnBrk="0" hangingPunct="1">
+              <a:lnSpc>
+                <a:spcPct val="90000"/>
+              </a:lnSpc>
+              <a:spcBef>
+                <a:spcPts val="500"/>
+              </a:spcBef>
+              <a:buFont typeface="Arial" panose="020B0604020202020204" pitchFamily="34" charset="0"/>
+              <a:buChar char="•"/>
+              <a:defRPr sz="1800" kern="1200">
+                <a:solidFill>
+                  <a:schemeClr val="tx1"/>
+                </a:solidFill>
+                <a:latin typeface="+mn-lt"/>
+                <a:ea typeface="+mn-ea"/>
+                <a:cs typeface="+mn-cs"/>
+              </a:defRPr>
+            </a:lvl8pPr>
+            <a:lvl9pPr marL="3886200" indent="-228600" algn="l" defTabSz="914400" rtl="0" eaLnBrk="1" latinLnBrk="0" hangingPunct="1">
+              <a:lnSpc>
+                <a:spcPct val="90000"/>
+              </a:lnSpc>
+              <a:spcBef>
+                <a:spcPts val="500"/>
+              </a:spcBef>
+              <a:buFont typeface="Arial" panose="020B0604020202020204" pitchFamily="34" charset="0"/>
+              <a:buChar char="•"/>
+              <a:defRPr sz="1800" kern="1200">
+                <a:solidFill>
+                  <a:schemeClr val="tx1"/>
+                </a:solidFill>
+                <a:latin typeface="+mn-lt"/>
+                <a:ea typeface="+mn-ea"/>
+                <a:cs typeface="+mn-cs"/>
+              </a:defRPr>
+            </a:lvl9pPr>
+          </a:lstStyle>
           <a:p>
             <a:pPr marL="0" indent="0">
+              <a:buFont typeface="Arial" panose="020B0604020202020204" pitchFamily="34" charset="0"/>
               <a:buNone/>
             </a:pPr>
             <a:r>
-              <a:rPr lang="en-US" sz="1400" dirty="0"/>
-              <a:t>Applications:</a:t>
-            </a:r>
-          </a:p>
-          <a:p>
-            <a:r>
-              <a:rPr lang="en-US" sz="1400" dirty="0"/>
-              <a:t>Semantic similarity</a:t>
-            </a:r>
-          </a:p>
-          <a:p>
-            <a:r>
-              <a:rPr lang="en-US" sz="1400" dirty="0"/>
-              <a:t>Clustering</a:t>
-            </a:r>
-          </a:p>
-          <a:p>
-            <a:r>
-              <a:rPr lang="en-US" sz="1400" dirty="0"/>
-              <a:t>Full-text search</a:t>
-            </a:r>
-          </a:p>
-          <a:p>
-            <a:r>
-              <a:rPr lang="en-US" sz="1400" dirty="0"/>
-              <a:t>Classification</a:t>
-            </a:r>
-          </a:p>
-          <a:p>
-            <a:r>
-              <a:rPr lang="en-US" sz="1400" dirty="0"/>
-              <a:t>Recommendations</a:t>
+              <a:rPr lang="en-US" dirty="0"/>
+              <a:t>RAG is ideal for Q&amp;A systems, content creation, and data-driven decision-making</a:t>
             </a:r>
           </a:p>
           <a:p>
             <a:pPr marL="0" indent="0">
+              <a:buFont typeface="Arial" panose="020B0604020202020204" pitchFamily="34" charset="0"/>
               <a:buNone/>
             </a:pPr>
-            <a:endParaRPr lang="en-US" sz="1400" dirty="0"/>
+            <a:r>
+              <a:rPr lang="en-US" dirty="0"/>
+              <a:t>It combines the best of both worlds – robust data retrieval and creative response generation</a:t>
+            </a:r>
+          </a:p>
+        </p:txBody>
+      </p:sp>
+      <p:sp>
+        <p:nvSpPr>
+          <p:cNvPr id="23" name="TextBox 22">
+            <a:extLst>
+              <a:ext uri="{FF2B5EF4-FFF2-40B4-BE49-F238E27FC236}">
+                <a16:creationId xmlns:a16="http://schemas.microsoft.com/office/drawing/2014/main" id="{4B07ADD1-106D-59DC-D41E-45260085D7D3}"/>
+              </a:ext>
+            </a:extLst>
+          </p:cNvPr>
+          <p:cNvSpPr txBox="1"/>
+          <p:nvPr/>
+        </p:nvSpPr>
+        <p:spPr>
+          <a:xfrm>
+            <a:off x="300855" y="5951119"/>
+            <a:ext cx="11657358" cy="369332"/>
+          </a:xfrm>
+          <a:prstGeom prst="rect">
+            <a:avLst/>
+          </a:prstGeom>
+          <a:noFill/>
+        </p:spPr>
+        <p:txBody>
+          <a:bodyPr wrap="none" rtlCol="0">
+            <a:spAutoFit/>
+          </a:bodyPr>
+          <a:lstStyle/>
+          <a:p>
+            <a:r>
+              <a:rPr lang="en-US" dirty="0">
+                <a:solidFill>
+                  <a:schemeClr val="tx2"/>
+                </a:solidFill>
+              </a:rPr>
+              <a:t>You need software infrastructure to run the retrieval. The model cannot run the retrieval on its own.</a:t>
+            </a:r>
+          </a:p>
+        </p:txBody>
+      </p:sp>
+      <p:sp>
+        <p:nvSpPr>
+          <p:cNvPr id="6" name="TextBox 5">
+            <a:extLst>
+              <a:ext uri="{FF2B5EF4-FFF2-40B4-BE49-F238E27FC236}">
+                <a16:creationId xmlns:a16="http://schemas.microsoft.com/office/drawing/2014/main" id="{BC9BC36F-953F-E536-BE32-7A76F7A2933E}"/>
+              </a:ext>
+            </a:extLst>
+          </p:cNvPr>
+          <p:cNvSpPr txBox="1"/>
+          <p:nvPr/>
+        </p:nvSpPr>
+        <p:spPr>
+          <a:xfrm>
+            <a:off x="4927542" y="1661227"/>
+            <a:ext cx="2721522" cy="261610"/>
+          </a:xfrm>
+          <a:prstGeom prst="rect">
+            <a:avLst/>
+          </a:prstGeom>
+          <a:noFill/>
+        </p:spPr>
+        <p:txBody>
+          <a:bodyPr wrap="square">
+            <a:spAutoFit/>
+          </a:bodyPr>
+          <a:lstStyle/>
+          <a:p>
+            <a:r>
+              <a:rPr lang="en-US" sz="1100" b="1" dirty="0"/>
+              <a:t>Chunking &amp; Indexing (offline)</a:t>
+            </a:r>
+          </a:p>
+        </p:txBody>
+      </p:sp>
+      <p:pic>
+        <p:nvPicPr>
+          <p:cNvPr id="9" name="Graphic 8" descr="Puzzle pieces with solid fill">
+            <a:extLst>
+              <a:ext uri="{FF2B5EF4-FFF2-40B4-BE49-F238E27FC236}">
+                <a16:creationId xmlns:a16="http://schemas.microsoft.com/office/drawing/2014/main" id="{26580C34-7F03-B4C2-36DC-4A5C2C55473C}"/>
+              </a:ext>
+            </a:extLst>
+          </p:cNvPr>
+          <p:cNvPicPr>
+            <a:picLocks noChangeAspect="1"/>
+          </p:cNvPicPr>
+          <p:nvPr/>
+        </p:nvPicPr>
+        <p:blipFill>
+          <a:blip r:embed="rId6">
+            <a:extLst>
+              <a:ext uri="{28A0092B-C50C-407E-A947-70E740481C1C}">
+                <a14:useLocalDpi xmlns:a14="http://schemas.microsoft.com/office/drawing/2010/main" val="0"/>
+              </a:ext>
+              <a:ext uri="{96DAC541-7B7A-43D3-8B79-37D633B846F1}">
+                <asvg:svgBlip xmlns:asvg="http://schemas.microsoft.com/office/drawing/2016/SVG/main" r:embed="rId7"/>
+              </a:ext>
+            </a:extLst>
+          </a:blip>
+          <a:srcRect/>
+          <a:stretch/>
+        </p:blipFill>
+        <p:spPr>
+          <a:xfrm>
+            <a:off x="5500452" y="1896253"/>
+            <a:ext cx="914400" cy="914400"/>
+          </a:xfrm>
+          <a:prstGeom prst="rect">
+            <a:avLst/>
+          </a:prstGeom>
+        </p:spPr>
+      </p:pic>
+      <p:pic>
+        <p:nvPicPr>
+          <p:cNvPr id="10" name="Graphic 9">
+            <a:extLst>
+              <a:ext uri="{FF2B5EF4-FFF2-40B4-BE49-F238E27FC236}">
+                <a16:creationId xmlns:a16="http://schemas.microsoft.com/office/drawing/2014/main" id="{CF7DCD4C-7596-8D1D-4ED1-030F9A51BC04}"/>
+              </a:ext>
+            </a:extLst>
+          </p:cNvPr>
+          <p:cNvPicPr>
+            <a:picLocks noChangeAspect="1"/>
+          </p:cNvPicPr>
+          <p:nvPr/>
+        </p:nvPicPr>
+        <p:blipFill>
+          <a:blip r:embed="rId8">
+            <a:extLst>
+              <a:ext uri="{28A0092B-C50C-407E-A947-70E740481C1C}">
+                <a14:useLocalDpi xmlns:a14="http://schemas.microsoft.com/office/drawing/2010/main" val="0"/>
+              </a:ext>
+            </a:extLst>
+          </a:blip>
+          <a:srcRect/>
+          <a:stretch/>
+        </p:blipFill>
+        <p:spPr>
+          <a:xfrm>
+            <a:off x="7589511" y="2007896"/>
+            <a:ext cx="730234" cy="744279"/>
+          </a:xfrm>
+          <a:prstGeom prst="rect">
+            <a:avLst/>
+          </a:prstGeom>
+        </p:spPr>
+      </p:pic>
+      <p:cxnSp>
+        <p:nvCxnSpPr>
+          <p:cNvPr id="11" name="Straight Arrow Connector 10">
+            <a:extLst>
+              <a:ext uri="{FF2B5EF4-FFF2-40B4-BE49-F238E27FC236}">
+                <a16:creationId xmlns:a16="http://schemas.microsoft.com/office/drawing/2014/main" id="{70954D9D-2009-BA8B-CEAF-82713117E396}"/>
+              </a:ext>
+            </a:extLst>
+          </p:cNvPr>
+          <p:cNvCxnSpPr>
+            <a:cxnSpLocks/>
+          </p:cNvCxnSpPr>
+          <p:nvPr/>
+        </p:nvCxnSpPr>
+        <p:spPr>
+          <a:xfrm>
+            <a:off x="6453837" y="2380036"/>
+            <a:ext cx="988828" cy="0"/>
+          </a:xfrm>
+          <a:prstGeom prst="straightConnector1">
+            <a:avLst/>
+          </a:prstGeom>
+          <a:ln w="38100">
+            <a:solidFill>
+              <a:schemeClr val="tx1"/>
+            </a:solidFill>
+            <a:tailEnd type="triangle"/>
+          </a:ln>
+        </p:spPr>
+        <p:style>
+          <a:lnRef idx="1">
+            <a:schemeClr val="accent1"/>
+          </a:lnRef>
+          <a:fillRef idx="0">
+            <a:schemeClr val="accent1"/>
+          </a:fillRef>
+          <a:effectRef idx="0">
+            <a:schemeClr val="accent1"/>
+          </a:effectRef>
+          <a:fontRef idx="minor">
+            <a:schemeClr val="tx1"/>
+          </a:fontRef>
+        </p:style>
+      </p:cxnSp>
+      <p:sp>
+        <p:nvSpPr>
+          <p:cNvPr id="12" name="TextBox 11">
+            <a:extLst>
+              <a:ext uri="{FF2B5EF4-FFF2-40B4-BE49-F238E27FC236}">
+                <a16:creationId xmlns:a16="http://schemas.microsoft.com/office/drawing/2014/main" id="{16C5BF07-7773-D773-1F05-6278DC2FD084}"/>
+              </a:ext>
+            </a:extLst>
+          </p:cNvPr>
+          <p:cNvSpPr txBox="1"/>
+          <p:nvPr/>
+        </p:nvSpPr>
+        <p:spPr>
+          <a:xfrm>
+            <a:off x="5555137" y="2810653"/>
+            <a:ext cx="805029" cy="307777"/>
+          </a:xfrm>
+          <a:prstGeom prst="rect">
+            <a:avLst/>
+          </a:prstGeom>
+          <a:noFill/>
+        </p:spPr>
+        <p:txBody>
+          <a:bodyPr wrap="none" rtlCol="0">
+            <a:spAutoFit/>
+          </a:bodyPr>
+          <a:lstStyle/>
+          <a:p>
+            <a:r>
+              <a:rPr lang="en-US" sz="1400" b="1" dirty="0"/>
+              <a:t>Chunk</a:t>
+            </a:r>
+          </a:p>
+        </p:txBody>
+      </p:sp>
+      <p:sp>
+        <p:nvSpPr>
+          <p:cNvPr id="14" name="TextBox 13">
+            <a:extLst>
+              <a:ext uri="{FF2B5EF4-FFF2-40B4-BE49-F238E27FC236}">
+                <a16:creationId xmlns:a16="http://schemas.microsoft.com/office/drawing/2014/main" id="{23D57F43-1066-6CB8-A83A-2006B2DAA592}"/>
+              </a:ext>
+            </a:extLst>
+          </p:cNvPr>
+          <p:cNvSpPr txBox="1"/>
+          <p:nvPr/>
+        </p:nvSpPr>
+        <p:spPr>
+          <a:xfrm>
+            <a:off x="7503551" y="2818628"/>
+            <a:ext cx="854721" cy="307777"/>
+          </a:xfrm>
+          <a:prstGeom prst="rect">
+            <a:avLst/>
+          </a:prstGeom>
+          <a:noFill/>
+        </p:spPr>
+        <p:txBody>
+          <a:bodyPr wrap="none" rtlCol="0">
+            <a:spAutoFit/>
+          </a:bodyPr>
+          <a:lstStyle/>
+          <a:p>
+            <a:r>
+              <a:rPr lang="en-US" sz="1400" b="1" dirty="0"/>
+              <a:t>Embed</a:t>
+            </a:r>
+          </a:p>
+        </p:txBody>
+      </p:sp>
+      <p:pic>
+        <p:nvPicPr>
+          <p:cNvPr id="16" name="Graphic 9" descr="Decision chart with solid fill">
+            <a:extLst>
+              <a:ext uri="{FF2B5EF4-FFF2-40B4-BE49-F238E27FC236}">
+                <a16:creationId xmlns:a16="http://schemas.microsoft.com/office/drawing/2014/main" id="{B21AECA0-2541-6CD1-FF2C-5C321C44B062}"/>
+              </a:ext>
+            </a:extLst>
+          </p:cNvPr>
+          <p:cNvPicPr>
+            <a:picLocks noChangeAspect="1"/>
+          </p:cNvPicPr>
+          <p:nvPr/>
+        </p:nvPicPr>
+        <p:blipFill>
+          <a:blip r:embed="rId9">
+            <a:extLst>
+              <a:ext uri="{28A0092B-C50C-407E-A947-70E740481C1C}">
+                <a14:useLocalDpi xmlns:a14="http://schemas.microsoft.com/office/drawing/2010/main" val="0"/>
+              </a:ext>
+              <a:ext uri="{96DAC541-7B7A-43D3-8B79-37D633B846F1}">
+                <asvg:svgBlip xmlns:asvg="http://schemas.microsoft.com/office/drawing/2016/SVG/main" r:embed="rId10"/>
+              </a:ext>
+            </a:extLst>
+          </a:blip>
+          <a:srcRect/>
+          <a:stretch/>
+        </p:blipFill>
+        <p:spPr>
+          <a:xfrm>
+            <a:off x="9532931" y="2026309"/>
+            <a:ext cx="730234" cy="730234"/>
+          </a:xfrm>
+          <a:prstGeom prst="rect">
+            <a:avLst/>
+          </a:prstGeom>
+        </p:spPr>
+      </p:pic>
+      <p:cxnSp>
+        <p:nvCxnSpPr>
+          <p:cNvPr id="17" name="Straight Arrow Connector 16">
+            <a:extLst>
+              <a:ext uri="{FF2B5EF4-FFF2-40B4-BE49-F238E27FC236}">
+                <a16:creationId xmlns:a16="http://schemas.microsoft.com/office/drawing/2014/main" id="{B0008ECC-EF09-0CAA-B166-77BE04063F63}"/>
+              </a:ext>
+            </a:extLst>
+          </p:cNvPr>
+          <p:cNvCxnSpPr>
+            <a:cxnSpLocks/>
+          </p:cNvCxnSpPr>
+          <p:nvPr/>
+        </p:nvCxnSpPr>
+        <p:spPr>
+          <a:xfrm>
+            <a:off x="8397257" y="2391427"/>
+            <a:ext cx="988828" cy="0"/>
+          </a:xfrm>
+          <a:prstGeom prst="straightConnector1">
+            <a:avLst/>
+          </a:prstGeom>
+          <a:ln w="38100">
+            <a:solidFill>
+              <a:schemeClr val="tx1"/>
+            </a:solidFill>
+            <a:tailEnd type="triangle"/>
+          </a:ln>
+        </p:spPr>
+        <p:style>
+          <a:lnRef idx="1">
+            <a:schemeClr val="accent1"/>
+          </a:lnRef>
+          <a:fillRef idx="0">
+            <a:schemeClr val="accent1"/>
+          </a:fillRef>
+          <a:effectRef idx="0">
+            <a:schemeClr val="accent1"/>
+          </a:effectRef>
+          <a:fontRef idx="minor">
+            <a:schemeClr val="tx1"/>
+          </a:fontRef>
+        </p:style>
+      </p:cxnSp>
+      <p:sp>
+        <p:nvSpPr>
+          <p:cNvPr id="24" name="TextBox 23">
+            <a:extLst>
+              <a:ext uri="{FF2B5EF4-FFF2-40B4-BE49-F238E27FC236}">
+                <a16:creationId xmlns:a16="http://schemas.microsoft.com/office/drawing/2014/main" id="{ACDD6435-26D1-E28F-3EA5-63DB15D7ECF5}"/>
+              </a:ext>
+            </a:extLst>
+          </p:cNvPr>
+          <p:cNvSpPr txBox="1"/>
+          <p:nvPr/>
+        </p:nvSpPr>
+        <p:spPr>
+          <a:xfrm>
+            <a:off x="9573097" y="2830019"/>
+            <a:ext cx="713657" cy="307777"/>
+          </a:xfrm>
+          <a:prstGeom prst="rect">
+            <a:avLst/>
+          </a:prstGeom>
+          <a:noFill/>
+        </p:spPr>
+        <p:txBody>
+          <a:bodyPr wrap="none" rtlCol="0">
+            <a:spAutoFit/>
+          </a:bodyPr>
+          <a:lstStyle/>
+          <a:p>
+            <a:r>
+              <a:rPr lang="en-US" sz="1400" b="1" dirty="0"/>
+              <a:t>Index</a:t>
+            </a:r>
+          </a:p>
+        </p:txBody>
+      </p:sp>
+      <p:sp>
+        <p:nvSpPr>
+          <p:cNvPr id="25" name="TextBox 24">
+            <a:extLst>
+              <a:ext uri="{FF2B5EF4-FFF2-40B4-BE49-F238E27FC236}">
+                <a16:creationId xmlns:a16="http://schemas.microsoft.com/office/drawing/2014/main" id="{17AB632C-374B-4279-6385-65BB41E89378}"/>
+              </a:ext>
+            </a:extLst>
+          </p:cNvPr>
+          <p:cNvSpPr txBox="1"/>
+          <p:nvPr/>
+        </p:nvSpPr>
+        <p:spPr>
+          <a:xfrm>
+            <a:off x="4927542" y="3209374"/>
+            <a:ext cx="2721522" cy="261610"/>
+          </a:xfrm>
+          <a:prstGeom prst="rect">
+            <a:avLst/>
+          </a:prstGeom>
+          <a:noFill/>
+        </p:spPr>
+        <p:txBody>
+          <a:bodyPr wrap="square">
+            <a:spAutoFit/>
+          </a:bodyPr>
+          <a:lstStyle/>
+          <a:p>
+            <a:r>
+              <a:rPr lang="en-US" sz="1100" b="1" dirty="0"/>
+              <a:t>Retrieval &amp; Generation (online)</a:t>
+            </a:r>
           </a:p>
         </p:txBody>
       </p:sp>
     </p:spTree>
     <p:extLst>
       <p:ext uri="{BB962C8B-B14F-4D97-AF65-F5344CB8AC3E}">
-        <p14:creationId xmlns:p14="http://schemas.microsoft.com/office/powerpoint/2010/main" val="3633329479"/>
+        <p14:creationId xmlns:p14="http://schemas.microsoft.com/office/powerpoint/2010/main" val="4152184282"/>
       </p:ext>
     </p:extLst>
   </p:cSld>
